--- a/outputs/notes-deck-20260610/presentations/notes-intro/output/notes-product-design.pptx
+++ b/outputs/notes-deck-20260610/presentations/notes-intro/output/notes-product-design.pptx
@@ -4,6 +4,9 @@
   <p:sldMasterIdLst>
     <p:sldMasterId id="2147483648" r:id="rId1"/>
   </p:sldMasterIdLst>
+  <p:notesMasterIdLst>
+    <p:notesMasterId r:id="rId12"/>
+  </p:notesMasterIdLst>
   <p:sldIdLst>
     <p:sldId id="256" r:id="rId2"/>
     <p:sldId id="257" r:id="rId3"/>
@@ -16,11 +19,8 @@
     <p:sldId id="264" r:id="rId10"/>
     <p:sldId id="265" r:id="rId11"/>
   </p:sldIdLst>
-  <p:notesMasterIdLst>
-    <p:notesMasterId r:id="rId12"/>
-  </p:notesMasterIdLst>
-  <p:sldSz cx="12191695" cy="6858000"/>
-  <p:notesSz cx="6858000" cy="12191695"/>
+  <p:sldSz cx="12192000" cy="6858000"/>
+  <p:notesSz cx="6858000" cy="12192000"/>
   <p:defaultTextStyle>
     <a:lvl1pPr marL="0" algn="l" defTabSz="914400" rtl="0" eaLnBrk="1" latinLnBrk="0" hangingPunct="1">
       <a:defRPr sz="1800" kern="1200">
@@ -113,6 +113,11 @@
       </a:defRPr>
     </a:lvl9pPr>
   </p:defaultTextStyle>
+  <p:extLst>
+    <p:ext uri="{EFAFB233-063F-42B5-8137-9DF3F51BA10A}">
+      <p15:sldGuideLst xmlns:p15="http://schemas.microsoft.com/office/powerpoint/2012/main"/>
+    </p:ext>
+  </p:extLst>
 </p:presentation>
 </file>
 
@@ -138,234 +143,10 @@
           <a:chExt cx="0" cy="0"/>
         </a:xfrm>
       </p:grpSpPr>
-      <p:sp>
-        <p:nvSpPr>
-          <p:cNvPr id="2" name="Header Placeholder 1"/>
-          <p:cNvSpPr>
-            <a:spLocks noGrp="1"/>
-          </p:cNvSpPr>
-          <p:nvPr>
-            <p:ph type="hdr" sz="quarter"/>
-          </p:nvPr>
-        </p:nvSpPr>
-        <p:spPr>
-          <a:xfrm>
-            <a:off x="0" y="0"/>
-            <a:ext cx="2971800" cy="458788"/>
-          </a:xfrm>
-          <a:prstGeom prst="rect">
-            <a:avLst/>
-          </a:prstGeom>
-        </p:spPr>
-        <p:txBody>
-          <a:bodyPr vert="horz" lIns="91440" tIns="45720" rIns="91440" bIns="45720" rtlCol="0"/>
-          <a:lstStyle>
-            <a:lvl1pPr algn="l">
-              <a:defRPr sz="1200"/>
-            </a:lvl1pPr>
-          </a:lstStyle>
-          <a:p>
-            <a:endParaRPr lang="en-US"/>
-          </a:p>
-        </p:txBody>
-      </p:sp>
-      <p:sp>
-        <p:nvSpPr>
-          <p:cNvPr id="3" name="Date Placeholder 2"/>
-          <p:cNvSpPr>
-            <a:spLocks noGrp="1"/>
-          </p:cNvSpPr>
-          <p:nvPr>
-            <p:ph type="dt" idx="1"/>
-          </p:nvPr>
-        </p:nvSpPr>
-        <p:spPr>
-          <a:xfrm>
-            <a:off x="3884613" y="0"/>
-            <a:ext cx="2971800" cy="458788"/>
-          </a:xfrm>
-          <a:prstGeom prst="rect">
-            <a:avLst/>
-          </a:prstGeom>
-        </p:spPr>
-        <p:txBody>
-          <a:bodyPr vert="horz" lIns="91440" tIns="45720" rIns="91440" bIns="45720" rtlCol="0"/>
-          <a:lstStyle>
-            <a:lvl1pPr algn="r">
-              <a:defRPr sz="1200"/>
-            </a:lvl1pPr>
-          </a:lstStyle>
-          <a:p>
-            <a:fld id="{5282F153-3F37-0F45-9E97-73ACFA13230C}" type="datetimeFigureOut">
-              <a:rPr lang="en-US"/>
-              <a:t>7/23/19</a:t>
-            </a:fld>
-            <a:endParaRPr lang="en-US"/>
-          </a:p>
-        </p:txBody>
-      </p:sp>
-      <p:sp>
-        <p:nvSpPr>
-          <p:cNvPr id="4" name="Slide Image Placeholder 3"/>
-          <p:cNvSpPr>
-            <a:spLocks noGrp="1" noRot="1" noChangeAspect="1"/>
-          </p:cNvSpPr>
-          <p:nvPr>
-            <p:ph type="sldImg" idx="2"/>
-          </p:nvPr>
-        </p:nvSpPr>
-        <p:spPr>
-          <a:xfrm>
-            <a:off x="685800" y="1143000"/>
-            <a:ext cx="5486400" cy="3086100"/>
-          </a:xfrm>
-          <a:prstGeom prst="rect">
-            <a:avLst/>
-          </a:prstGeom>
-          <a:noFill/>
-          <a:ln w="12700">
-            <a:solidFill>
-              <a:prstClr val="black"/>
-            </a:solidFill>
-          </a:ln>
-        </p:spPr>
-        <p:txBody>
-          <a:bodyPr vert="horz" lIns="91440" tIns="45720" rIns="91440" bIns="45720" rtlCol="0" anchor="ctr"/>
-          <a:lstStyle/>
-          <a:p>
-            <a:endParaRPr lang="en-US"/>
-          </a:p>
-        </p:txBody>
-      </p:sp>
-      <p:sp>
-        <p:nvSpPr>
-          <p:cNvPr id="5" name="Notes Placeholder 4"/>
-          <p:cNvSpPr>
-            <a:spLocks noGrp="1"/>
-          </p:cNvSpPr>
-          <p:nvPr>
-            <p:ph type="body" sz="quarter" idx="3"/>
-          </p:nvPr>
-        </p:nvSpPr>
-        <p:spPr>
-          <a:xfrm>
-            <a:off x="685800" y="4400550"/>
-            <a:ext cx="5486400" cy="3600450"/>
-          </a:xfrm>
-          <a:prstGeom prst="rect">
-            <a:avLst/>
-          </a:prstGeom>
-        </p:spPr>
-        <p:txBody>
-          <a:bodyPr vert="horz" lIns="91440" tIns="45720" rIns="91440" bIns="45720" rtlCol="0"/>
-          <a:lstStyle/>
-          <a:p>
-            <a:pPr lvl="0"/>
-            <a:r>
-              <a:rPr lang="en-US"/>
-              <a:t>Click to edit Master text styles</a:t>
-            </a:r>
-          </a:p>
-          <a:p>
-            <a:pPr lvl="1"/>
-            <a:r>
-              <a:rPr lang="en-US"/>
-              <a:t>Second level</a:t>
-            </a:r>
-          </a:p>
-          <a:p>
-            <a:pPr lvl="2"/>
-            <a:r>
-              <a:rPr lang="en-US"/>
-              <a:t>Third level</a:t>
-            </a:r>
-          </a:p>
-          <a:p>
-            <a:pPr lvl="3"/>
-            <a:r>
-              <a:rPr lang="en-US"/>
-              <a:t>Fourth level</a:t>
-            </a:r>
-          </a:p>
-          <a:p>
-            <a:pPr lvl="4"/>
-            <a:r>
-              <a:rPr lang="en-US"/>
-              <a:t>Fifth level</a:t>
-            </a:r>
-          </a:p>
-        </p:txBody>
-      </p:sp>
-      <p:sp>
-        <p:nvSpPr>
-          <p:cNvPr id="6" name="Footer Placeholder 5"/>
-          <p:cNvSpPr>
-            <a:spLocks noGrp="1"/>
-          </p:cNvSpPr>
-          <p:nvPr>
-            <p:ph type="ftr" sz="quarter" idx="4"/>
-          </p:nvPr>
-        </p:nvSpPr>
-        <p:spPr>
-          <a:xfrm>
-            <a:off x="0" y="8685213"/>
-            <a:ext cx="2971800" cy="458787"/>
-          </a:xfrm>
-          <a:prstGeom prst="rect">
-            <a:avLst/>
-          </a:prstGeom>
-        </p:spPr>
-        <p:txBody>
-          <a:bodyPr vert="horz" lIns="91440" tIns="45720" rIns="91440" bIns="45720" rtlCol="0" anchor="b"/>
-          <a:lstStyle>
-            <a:lvl1pPr algn="l">
-              <a:defRPr sz="1200"/>
-            </a:lvl1pPr>
-          </a:lstStyle>
-          <a:p>
-            <a:endParaRPr lang="en-US"/>
-          </a:p>
-        </p:txBody>
-      </p:sp>
-      <p:sp>
-        <p:nvSpPr>
-          <p:cNvPr id="7" name="Slide Number Placeholder 6"/>
-          <p:cNvSpPr>
-            <a:spLocks noGrp="1"/>
-          </p:cNvSpPr>
-          <p:nvPr>
-            <p:ph type="sldNum" sz="quarter" idx="5"/>
-          </p:nvPr>
-        </p:nvSpPr>
-        <p:spPr>
-          <a:xfrm>
-            <a:off x="3884613" y="8685213"/>
-            <a:ext cx="2971800" cy="458787"/>
-          </a:xfrm>
-          <a:prstGeom prst="rect">
-            <a:avLst/>
-          </a:prstGeom>
-        </p:spPr>
-        <p:txBody>
-          <a:bodyPr vert="horz" lIns="91440" tIns="45720" rIns="91440" bIns="45720" rtlCol="0" anchor="b"/>
-          <a:lstStyle>
-            <a:lvl1pPr algn="r">
-              <a:defRPr sz="1200"/>
-            </a:lvl1pPr>
-          </a:lstStyle>
-          <a:p>
-            <a:fld id="{CE5E9CC1-C706-0F49-92D6-E571CC5EEA8F}" type="slidenum">
-              <a:rPr lang="en-US"/>
-              <a:t>‹#›</a:t>
-            </a:fld>
-            <a:endParaRPr lang="en-US"/>
-          </a:p>
-        </p:txBody>
-      </p:sp>
     </p:spTree>
     <p:extLst>
       <p:ext uri="{BB962C8B-B14F-4D97-AF65-F5344CB8AC3E}">
-        <p14:creationId xmlns:p14="http://schemas.microsoft.com/office/powerpoint/2010/main" val="1024086991"/>
+        <p14:creationId xmlns:p14="http://schemas.microsoft.com/office/powerpoint/2010/main" val="1454528929"/>
       </p:ext>
     </p:extLst>
   </p:cSld>
@@ -509,10 +290,6 @@
           <a:bodyPr/>
           <a:lstStyle/>
           <a:p>
-            <a:r>
-              <a:rPr lang="en-US" dirty="0"/>
-              <a:t/>
-            </a:r>
             <a:endParaRPr lang="en-US" dirty="0"/>
           </a:p>
         </p:txBody>
@@ -597,10 +374,6 @@
           <a:bodyPr/>
           <a:lstStyle/>
           <a:p>
-            <a:r>
-              <a:rPr lang="en-US" dirty="0"/>
-              <a:t/>
-            </a:r>
             <a:endParaRPr lang="en-US" dirty="0"/>
           </a:p>
         </p:txBody>
@@ -685,10 +458,6 @@
           <a:bodyPr/>
           <a:lstStyle/>
           <a:p>
-            <a:r>
-              <a:rPr lang="en-US" dirty="0"/>
-              <a:t/>
-            </a:r>
             <a:endParaRPr lang="en-US" dirty="0"/>
           </a:p>
         </p:txBody>
@@ -773,10 +542,6 @@
           <a:bodyPr/>
           <a:lstStyle/>
           <a:p>
-            <a:r>
-              <a:rPr lang="en-US" dirty="0"/>
-              <a:t/>
-            </a:r>
             <a:endParaRPr lang="en-US" dirty="0"/>
           </a:p>
         </p:txBody>
@@ -861,10 +626,6 @@
           <a:bodyPr/>
           <a:lstStyle/>
           <a:p>
-            <a:r>
-              <a:rPr lang="en-US" dirty="0"/>
-              <a:t/>
-            </a:r>
             <a:endParaRPr lang="en-US" dirty="0"/>
           </a:p>
         </p:txBody>
@@ -949,10 +710,6 @@
           <a:bodyPr/>
           <a:lstStyle/>
           <a:p>
-            <a:r>
-              <a:rPr lang="en-US" dirty="0"/>
-              <a:t/>
-            </a:r>
             <a:endParaRPr lang="en-US" dirty="0"/>
           </a:p>
         </p:txBody>
@@ -1037,10 +794,6 @@
           <a:bodyPr/>
           <a:lstStyle/>
           <a:p>
-            <a:r>
-              <a:rPr lang="en-US" dirty="0"/>
-              <a:t/>
-            </a:r>
             <a:endParaRPr lang="en-US" dirty="0"/>
           </a:p>
         </p:txBody>
@@ -1125,10 +878,6 @@
           <a:bodyPr/>
           <a:lstStyle/>
           <a:p>
-            <a:r>
-              <a:rPr lang="en-US" dirty="0"/>
-              <a:t/>
-            </a:r>
             <a:endParaRPr lang="en-US" dirty="0"/>
           </a:p>
         </p:txBody>
@@ -1213,10 +962,6 @@
           <a:bodyPr/>
           <a:lstStyle/>
           <a:p>
-            <a:r>
-              <a:rPr lang="en-US" dirty="0"/>
-              <a:t/>
-            </a:r>
             <a:endParaRPr lang="en-US" dirty="0"/>
           </a:p>
         </p:txBody>
@@ -1301,10 +1046,6 @@
           <a:bodyPr/>
           <a:lstStyle/>
           <a:p>
-            <a:r>
-              <a:rPr lang="en-US" dirty="0"/>
-              <a:t/>
-            </a:r>
             <a:endParaRPr lang="en-US" dirty="0"/>
           </a:p>
         </p:txBody>
@@ -1378,6 +1119,11 @@
 <file path=ppt/slideMasters/slideMaster1.xml><?xml version="1.0" encoding="utf-8"?>
 <p:sldMaster xmlns:a="http://schemas.openxmlformats.org/drawingml/2006/main" xmlns:r="http://schemas.openxmlformats.org/officeDocument/2006/relationships" xmlns:p="http://schemas.openxmlformats.org/presentationml/2006/main">
   <p:cSld>
+    <p:bg>
+      <p:bgRef idx="1001">
+        <a:schemeClr val="bg1"/>
+      </p:bgRef>
+    </p:bg>
     <p:spTree>
       <p:nvGrpSpPr>
         <p:cNvPr id="1" name=""/>
@@ -1660,6 +1406,7 @@
         <a:solidFill>
           <a:srgbClr val="1A1A2E"/>
         </a:solidFill>
+        <a:effectLst/>
       </p:bgPr>
     </p:bg>
     <p:spTree>
@@ -1697,7 +1444,7 @@
           <a:bodyPr wrap="square" rtlCol="0" anchor="ctr"/>
           <a:lstStyle/>
           <a:p>
-            <a:pPr algn="ctr" indent="0" marL="0">
+            <a:pPr marL="0" indent="0" algn="ctr">
               <a:buNone/>
             </a:pPr>
             <a:r>
@@ -1756,7 +1503,7 @@
           <a:bodyPr wrap="square" rtlCol="0" anchor="ctr"/>
           <a:lstStyle/>
           <a:p>
-            <a:pPr algn="ctr" indent="0" marL="0">
+            <a:pPr marL="0" indent="0" algn="ctr">
               <a:buNone/>
             </a:pPr>
             <a:r>
@@ -1795,7 +1542,7 @@
           <a:bodyPr wrap="square" rtlCol="0" anchor="ctr"/>
           <a:lstStyle/>
           <a:p>
-            <a:pPr algn="ctr" indent="0" marL="0">
+            <a:pPr marL="0" indent="0" algn="ctr">
               <a:buNone/>
             </a:pPr>
             <a:r>
@@ -1861,7 +1608,7 @@
           <a:bodyPr wrap="square" rtlCol="0" anchor="ctr"/>
           <a:lstStyle/>
           <a:p>
-            <a:pPr algn="ctr" indent="0" marL="0">
+            <a:pPr marL="0" indent="0" algn="ctr">
               <a:buNone/>
             </a:pPr>
             <a:r>
@@ -1900,7 +1647,7 @@
           <a:bodyPr wrap="square" rtlCol="0" anchor="ctr"/>
           <a:lstStyle/>
           <a:p>
-            <a:pPr algn="ctr" indent="0" marL="0">
+            <a:pPr marL="0" indent="0" algn="ctr">
               <a:buNone/>
             </a:pPr>
             <a:r>
@@ -1934,6 +1681,7 @@
         <a:solidFill>
           <a:srgbClr val="FAF8F5"/>
         </a:solidFill>
+        <a:effectLst/>
       </p:bgPr>
     </p:bg>
     <p:spTree>
@@ -1971,11 +1719,11 @@
           <a:bodyPr wrap="square" rtlCol="0" anchor="ctr"/>
           <a:lstStyle/>
           <a:p>
-            <a:pPr indent="0" marL="0">
-              <a:buNone/>
-            </a:pPr>
-            <a:r>
-              <a:rPr lang="en-US" sz="1100" b="1" spc="200" kern="0" dirty="0">
+            <a:pPr marL="0" indent="0">
+              <a:buNone/>
+            </a:pPr>
+            <a:r>
+              <a:rPr lang="en-US" sz="1100" b="1" kern="0" spc="200" dirty="0">
                 <a:solidFill>
                   <a:srgbClr val="E07B5A"/>
                 </a:solidFill>
@@ -2010,7 +1758,7 @@
           <a:bodyPr wrap="square" rtlCol="0" anchor="ctr"/>
           <a:lstStyle/>
           <a:p>
-            <a:pPr indent="0" marL="0">
+            <a:pPr marL="0" indent="0">
               <a:lnSpc>
                 <a:spcPct val="110000"/>
               </a:lnSpc>
@@ -2052,7 +1800,7 @@
           <a:bodyPr wrap="square" rtlCol="0" anchor="ctr"/>
           <a:lstStyle/>
           <a:p>
-            <a:pPr indent="0" marL="0">
+            <a:pPr marL="0" indent="0">
               <a:buNone/>
             </a:pPr>
             <a:r>
@@ -2113,7 +1861,7 @@
           <a:bodyPr wrap="square" rtlCol="0" anchor="ctr"/>
           <a:lstStyle/>
           <a:p>
-            <a:pPr algn="ctr" indent="0" marL="0">
+            <a:pPr marL="0" indent="0" algn="ctr">
               <a:buNone/>
             </a:pPr>
             <a:r>
@@ -2174,7 +1922,7 @@
           <a:bodyPr wrap="square" rtlCol="0" anchor="ctr"/>
           <a:lstStyle/>
           <a:p>
-            <a:pPr algn="ctr" indent="0" marL="0">
+            <a:pPr marL="0" indent="0" algn="ctr">
               <a:buNone/>
             </a:pPr>
             <a:r>
@@ -2235,7 +1983,7 @@
           <a:bodyPr wrap="square" rtlCol="0" anchor="ctr"/>
           <a:lstStyle/>
           <a:p>
-            <a:pPr algn="ctr" indent="0" marL="0">
+            <a:pPr marL="0" indent="0" algn="ctr">
               <a:buNone/>
             </a:pPr>
             <a:r>
@@ -2296,7 +2044,7 @@
           <a:bodyPr wrap="square" rtlCol="0" anchor="ctr"/>
           <a:lstStyle/>
           <a:p>
-            <a:pPr algn="ctr" indent="0" marL="0">
+            <a:pPr marL="0" indent="0" algn="ctr">
               <a:buNone/>
             </a:pPr>
             <a:r>
@@ -2357,7 +2105,7 @@
           <a:bodyPr wrap="square" rtlCol="0" anchor="ctr"/>
           <a:lstStyle/>
           <a:p>
-            <a:pPr algn="ctr" indent="0" marL="0">
+            <a:pPr marL="0" indent="0" algn="ctr">
               <a:buNone/>
             </a:pPr>
             <a:r>
@@ -2418,7 +2166,7 @@
           <a:bodyPr wrap="square" rtlCol="0" anchor="ctr"/>
           <a:lstStyle/>
           <a:p>
-            <a:pPr algn="ctr" indent="0" marL="0">
+            <a:pPr marL="0" indent="0" algn="ctr">
               <a:buNone/>
             </a:pPr>
             <a:r>
@@ -2479,7 +2227,7 @@
           <a:bodyPr wrap="square" rtlCol="0" anchor="ctr"/>
           <a:lstStyle/>
           <a:p>
-            <a:pPr algn="ctr" indent="0" marL="0">
+            <a:pPr marL="0" indent="0" algn="ctr">
               <a:buNone/>
             </a:pPr>
             <a:r>
@@ -2540,7 +2288,7 @@
           <a:bodyPr wrap="square" rtlCol="0" anchor="ctr"/>
           <a:lstStyle/>
           <a:p>
-            <a:pPr algn="ctr" indent="0" marL="0">
+            <a:pPr marL="0" indent="0" algn="ctr">
               <a:buNone/>
             </a:pPr>
             <a:r>
@@ -2601,7 +2349,7 @@
           <a:bodyPr wrap="square" rtlCol="0" anchor="ctr"/>
           <a:lstStyle/>
           <a:p>
-            <a:pPr algn="ctr" indent="0" marL="0">
+            <a:pPr marL="0" indent="0" algn="ctr">
               <a:buNone/>
             </a:pPr>
             <a:r>
@@ -2640,7 +2388,7 @@
           <a:bodyPr wrap="square" rtlCol="0" anchor="ctr"/>
           <a:lstStyle/>
           <a:p>
-            <a:pPr indent="0" marL="0">
+            <a:pPr marL="0" indent="0">
               <a:buNone/>
             </a:pPr>
             <a:r>
@@ -2701,7 +2449,7 @@
           <a:bodyPr wrap="square" rtlCol="0" anchor="ctr"/>
           <a:lstStyle/>
           <a:p>
-            <a:pPr algn="ctr" indent="0" marL="0">
+            <a:pPr marL="0" indent="0" algn="ctr">
               <a:buNone/>
             </a:pPr>
             <a:r>
@@ -2762,7 +2510,7 @@
           <a:bodyPr wrap="square" rtlCol="0" anchor="ctr"/>
           <a:lstStyle/>
           <a:p>
-            <a:pPr algn="ctr" indent="0" marL="0">
+            <a:pPr marL="0" indent="0" algn="ctr">
               <a:buNone/>
             </a:pPr>
             <a:r>
@@ -2823,7 +2571,7 @@
           <a:bodyPr wrap="square" rtlCol="0" anchor="ctr"/>
           <a:lstStyle/>
           <a:p>
-            <a:pPr algn="ctr" indent="0" marL="0">
+            <a:pPr marL="0" indent="0" algn="ctr">
               <a:buNone/>
             </a:pPr>
             <a:r>
@@ -2882,7 +2630,7 @@
           <a:bodyPr wrap="square" rtlCol="0" anchor="ctr"/>
           <a:lstStyle/>
           <a:p>
-            <a:pPr indent="0" marL="0">
+            <a:pPr marL="0" indent="0">
               <a:buNone/>
             </a:pPr>
             <a:r>
@@ -2941,7 +2689,7 @@
           <a:bodyPr wrap="square" rtlCol="0" anchor="ctr"/>
           <a:lstStyle/>
           <a:p>
-            <a:pPr indent="0" marL="0">
+            <a:pPr marL="0" indent="0">
               <a:buNone/>
             </a:pPr>
             <a:r>
@@ -3000,7 +2748,7 @@
           <a:bodyPr wrap="square" rtlCol="0" anchor="ctr"/>
           <a:lstStyle/>
           <a:p>
-            <a:pPr indent="0" marL="0">
+            <a:pPr marL="0" indent="0">
               <a:buNone/>
             </a:pPr>
             <a:r>
@@ -3059,7 +2807,7 @@
           <a:bodyPr wrap="square" rtlCol="0" anchor="ctr"/>
           <a:lstStyle/>
           <a:p>
-            <a:pPr indent="0" marL="0">
+            <a:pPr marL="0" indent="0">
               <a:buNone/>
             </a:pPr>
             <a:r>
@@ -3118,7 +2866,7 @@
           <a:bodyPr wrap="square" rtlCol="0" anchor="ctr"/>
           <a:lstStyle/>
           <a:p>
-            <a:pPr indent="0" marL="0">
+            <a:pPr marL="0" indent="0">
               <a:buNone/>
             </a:pPr>
             <a:r>
@@ -3177,7 +2925,7 @@
           <a:bodyPr wrap="square" rtlCol="0" anchor="ctr"/>
           <a:lstStyle/>
           <a:p>
-            <a:pPr indent="0" marL="0">
+            <a:pPr marL="0" indent="0">
               <a:buNone/>
             </a:pPr>
             <a:r>
@@ -3236,7 +2984,7 @@
           <a:bodyPr wrap="square" rtlCol="0" anchor="ctr"/>
           <a:lstStyle/>
           <a:p>
-            <a:pPr indent="0" marL="0">
+            <a:pPr marL="0" indent="0">
               <a:buNone/>
             </a:pPr>
             <a:r>
@@ -3295,7 +3043,7 @@
           <a:bodyPr wrap="square" rtlCol="0" anchor="ctr"/>
           <a:lstStyle/>
           <a:p>
-            <a:pPr indent="0" marL="0">
+            <a:pPr marL="0" indent="0">
               <a:buNone/>
             </a:pPr>
             <a:r>
@@ -3354,7 +3102,7 @@
           <a:bodyPr wrap="square" rtlCol="0" anchor="ctr"/>
           <a:lstStyle/>
           <a:p>
-            <a:pPr indent="0" marL="0">
+            <a:pPr marL="0" indent="0">
               <a:buNone/>
             </a:pPr>
             <a:r>
@@ -3413,7 +3161,7 @@
           <a:bodyPr wrap="square" rtlCol="0" anchor="ctr"/>
           <a:lstStyle/>
           <a:p>
-            <a:pPr indent="0" marL="0">
+            <a:pPr marL="0" indent="0">
               <a:buNone/>
             </a:pPr>
             <a:r>
@@ -3472,7 +3220,7 @@
           <a:bodyPr wrap="square" rtlCol="0" anchor="ctr"/>
           <a:lstStyle/>
           <a:p>
-            <a:pPr indent="0" marL="0">
+            <a:pPr marL="0" indent="0">
               <a:buNone/>
             </a:pPr>
             <a:r>
@@ -3531,7 +3279,7 @@
           <a:bodyPr wrap="square" rtlCol="0" anchor="ctr"/>
           <a:lstStyle/>
           <a:p>
-            <a:pPr indent="0" marL="0">
+            <a:pPr marL="0" indent="0">
               <a:buNone/>
             </a:pPr>
             <a:r>
@@ -3570,7 +3318,7 @@
           <a:bodyPr wrap="square" rtlCol="0" anchor="ctr"/>
           <a:lstStyle/>
           <a:p>
-            <a:pPr indent="0" marL="0">
+            <a:pPr marL="0" indent="0">
               <a:buNone/>
             </a:pPr>
             <a:r>
@@ -3631,7 +3379,7 @@
           <a:bodyPr wrap="square" rtlCol="0" anchor="b"/>
           <a:lstStyle/>
           <a:p>
-            <a:pPr algn="ctr" indent="0" marL="0">
+            <a:pPr marL="0" indent="0" algn="ctr">
               <a:buNone/>
             </a:pPr>
             <a:r>
@@ -3670,7 +3418,7 @@
           <a:bodyPr wrap="square" rtlCol="0" anchor="t"/>
           <a:lstStyle/>
           <a:p>
-            <a:pPr algn="ctr" indent="0" marL="0">
+            <a:pPr marL="0" indent="0" algn="ctr">
               <a:buNone/>
             </a:pPr>
             <a:r>
@@ -3731,7 +3479,7 @@
           <a:bodyPr wrap="square" rtlCol="0" anchor="b"/>
           <a:lstStyle/>
           <a:p>
-            <a:pPr algn="ctr" indent="0" marL="0">
+            <a:pPr marL="0" indent="0" algn="ctr">
               <a:buNone/>
             </a:pPr>
             <a:r>
@@ -3770,7 +3518,7 @@
           <a:bodyPr wrap="square" rtlCol="0" anchor="t"/>
           <a:lstStyle/>
           <a:p>
-            <a:pPr algn="ctr" indent="0" marL="0">
+            <a:pPr marL="0" indent="0" algn="ctr">
               <a:buNone/>
             </a:pPr>
             <a:r>
@@ -3831,7 +3579,7 @@
           <a:bodyPr wrap="square" rtlCol="0" anchor="b"/>
           <a:lstStyle/>
           <a:p>
-            <a:pPr algn="ctr" indent="0" marL="0">
+            <a:pPr marL="0" indent="0" algn="ctr">
               <a:buNone/>
             </a:pPr>
             <a:r>
@@ -3870,7 +3618,7 @@
           <a:bodyPr wrap="square" rtlCol="0" anchor="t"/>
           <a:lstStyle/>
           <a:p>
-            <a:pPr algn="ctr" indent="0" marL="0">
+            <a:pPr marL="0" indent="0" algn="ctr">
               <a:buNone/>
             </a:pPr>
             <a:r>
@@ -3931,7 +3679,7 @@
           <a:bodyPr wrap="square" rtlCol="0" anchor="b"/>
           <a:lstStyle/>
           <a:p>
-            <a:pPr algn="ctr" indent="0" marL="0">
+            <a:pPr marL="0" indent="0" algn="ctr">
               <a:buNone/>
             </a:pPr>
             <a:r>
@@ -3970,7 +3718,7 @@
           <a:bodyPr wrap="square" rtlCol="0" anchor="t"/>
           <a:lstStyle/>
           <a:p>
-            <a:pPr algn="ctr" indent="0" marL="0">
+            <a:pPr marL="0" indent="0" algn="ctr">
               <a:buNone/>
             </a:pPr>
             <a:r>
@@ -4009,7 +3757,7 @@
           <a:bodyPr wrap="square" rtlCol="0" anchor="ctr"/>
           <a:lstStyle/>
           <a:p>
-            <a:pPr indent="0" marL="0">
+            <a:pPr marL="0" indent="0">
               <a:buNone/>
             </a:pPr>
             <a:r>
@@ -4048,7 +3796,7 @@
           <a:bodyPr wrap="square" rtlCol="0" anchor="ctr"/>
           <a:lstStyle/>
           <a:p>
-            <a:pPr algn="r" indent="0" marL="0">
+            <a:pPr marL="0" indent="0" algn="r">
               <a:buNone/>
             </a:pPr>
             <a:r>
@@ -4082,6 +3830,7 @@
         <a:solidFill>
           <a:srgbClr val="FAF8F5"/>
         </a:solidFill>
+        <a:effectLst/>
       </p:bgPr>
     </p:bg>
     <p:spTree>
@@ -4119,11 +3868,11 @@
           <a:bodyPr wrap="square" rtlCol="0" anchor="ctr"/>
           <a:lstStyle/>
           <a:p>
-            <a:pPr indent="0" marL="0">
-              <a:buNone/>
-            </a:pPr>
-            <a:r>
-              <a:rPr lang="en-US" sz="1100" b="1" spc="200" kern="0" dirty="0">
+            <a:pPr marL="0" indent="0">
+              <a:buNone/>
+            </a:pPr>
+            <a:r>
+              <a:rPr lang="en-US" sz="1100" b="1" kern="0" spc="200" dirty="0">
                 <a:solidFill>
                   <a:srgbClr val="E07B5A"/>
                 </a:solidFill>
@@ -4158,7 +3907,7 @@
           <a:bodyPr wrap="square" rtlCol="0" anchor="ctr"/>
           <a:lstStyle/>
           <a:p>
-            <a:pPr indent="0" marL="0">
+            <a:pPr marL="0" indent="0">
               <a:lnSpc>
                 <a:spcPct val="110000"/>
               </a:lnSpc>
@@ -4200,7 +3949,7 @@
           <a:bodyPr wrap="square" rtlCol="0" anchor="ctr"/>
           <a:lstStyle/>
           <a:p>
-            <a:pPr indent="0" marL="0">
+            <a:pPr marL="0" indent="0">
               <a:buNone/>
             </a:pPr>
             <a:r>
@@ -4239,7 +3988,7 @@
           <a:bodyPr wrap="square" rtlCol="0" anchor="ctr"/>
           <a:lstStyle/>
           <a:p>
-            <a:pPr indent="0" marL="0">
+            <a:pPr marL="0" indent="0">
               <a:buNone/>
             </a:pPr>
             <a:r>
@@ -4278,7 +4027,7 @@
           <a:bodyPr wrap="square" rtlCol="0" anchor="ctr"/>
           <a:lstStyle/>
           <a:p>
-            <a:pPr indent="0" marL="0">
+            <a:pPr marL="0" indent="0">
               <a:buNone/>
             </a:pPr>
             <a:r>
@@ -4317,7 +4066,7 @@
           <a:bodyPr wrap="square" rtlCol="0" anchor="ctr"/>
           <a:lstStyle/>
           <a:p>
-            <a:pPr indent="0" marL="0">
+            <a:pPr marL="0" indent="0">
               <a:buNone/>
             </a:pPr>
             <a:r>
@@ -4356,7 +4105,7 @@
           <a:bodyPr wrap="square" rtlCol="0" anchor="ctr"/>
           <a:lstStyle/>
           <a:p>
-            <a:pPr indent="0" marL="0">
+            <a:pPr marL="0" indent="0">
               <a:buNone/>
             </a:pPr>
             <a:r>
@@ -4395,7 +4144,7 @@
           <a:bodyPr wrap="square" rtlCol="0" anchor="ctr"/>
           <a:lstStyle/>
           <a:p>
-            <a:pPr indent="0" marL="0">
+            <a:pPr marL="0" indent="0">
               <a:buNone/>
             </a:pPr>
             <a:r>
@@ -4434,7 +4183,7 @@
           <a:bodyPr wrap="square" rtlCol="0" anchor="ctr"/>
           <a:lstStyle/>
           <a:p>
-            <a:pPr indent="0" marL="0">
+            <a:pPr marL="0" indent="0">
               <a:buNone/>
             </a:pPr>
             <a:r>
@@ -4473,7 +4222,7 @@
           <a:bodyPr wrap="square" rtlCol="0" anchor="ctr"/>
           <a:lstStyle/>
           <a:p>
-            <a:pPr indent="0" marL="0">
+            <a:pPr marL="0" indent="0">
               <a:buNone/>
             </a:pPr>
             <a:r>
@@ -4512,7 +4261,7 @@
           <a:bodyPr wrap="square" rtlCol="0" anchor="ctr"/>
           <a:lstStyle/>
           <a:p>
-            <a:pPr indent="0" marL="0">
+            <a:pPr marL="0" indent="0">
               <a:buNone/>
             </a:pPr>
             <a:r>
@@ -4600,7 +4349,7 @@
           <a:bodyPr wrap="square" rtlCol="0" anchor="ctr"/>
           <a:lstStyle/>
           <a:p>
-            <a:pPr indent="0" marL="0">
+            <a:pPr marL="0" indent="0">
               <a:buNone/>
             </a:pPr>
             <a:r>
@@ -4661,7 +4410,7 @@
           <a:bodyPr wrap="square" rtlCol="0" anchor="ctr"/>
           <a:lstStyle/>
           <a:p>
-            <a:pPr algn="ctr" indent="0" marL="0">
+            <a:pPr marL="0" indent="0" algn="ctr">
               <a:buNone/>
             </a:pPr>
             <a:r>
@@ -4722,7 +4471,7 @@
           <a:bodyPr wrap="square" rtlCol="0" anchor="ctr"/>
           <a:lstStyle/>
           <a:p>
-            <a:pPr algn="ctr" indent="0" marL="0">
+            <a:pPr marL="0" indent="0" algn="ctr">
               <a:buNone/>
             </a:pPr>
             <a:r>
@@ -4783,7 +4532,7 @@
           <a:bodyPr wrap="square" rtlCol="0" anchor="ctr"/>
           <a:lstStyle/>
           <a:p>
-            <a:pPr algn="ctr" indent="0" marL="0">
+            <a:pPr marL="0" indent="0" algn="ctr">
               <a:buNone/>
             </a:pPr>
             <a:r>
@@ -4844,7 +4593,7 @@
           <a:bodyPr wrap="square" rtlCol="0" anchor="ctr"/>
           <a:lstStyle/>
           <a:p>
-            <a:pPr algn="ctr" indent="0" marL="0">
+            <a:pPr marL="0" indent="0" algn="ctr">
               <a:buNone/>
             </a:pPr>
             <a:r>
@@ -4910,7 +4659,7 @@
           <a:bodyPr wrap="square" rtlCol="0" anchor="ctr"/>
           <a:lstStyle/>
           <a:p>
-            <a:pPr indent="0" marL="0">
+            <a:pPr marL="0" indent="0">
               <a:buNone/>
             </a:pPr>
             <a:r>
@@ -4971,7 +4720,7 @@
           <a:bodyPr wrap="square" rtlCol="0" anchor="ctr"/>
           <a:lstStyle/>
           <a:p>
-            <a:pPr algn="ctr" indent="0" marL="0">
+            <a:pPr marL="0" indent="0" algn="ctr">
               <a:buNone/>
             </a:pPr>
             <a:r>
@@ -5037,7 +4786,7 @@
           <a:bodyPr wrap="square" rtlCol="0" anchor="ctr"/>
           <a:lstStyle/>
           <a:p>
-            <a:pPr algn="ctr" indent="0" marL="0">
+            <a:pPr marL="0" indent="0" algn="ctr">
               <a:buNone/>
             </a:pPr>
             <a:r>
@@ -5054,7 +4803,7 @@
             <a:endParaRPr lang="en-US" sz="1000" dirty="0"/>
           </a:p>
           <a:p>
-            <a:pPr algn="ctr" indent="0" marL="0">
+            <a:pPr marL="0" indent="0" algn="ctr">
               <a:buNone/>
             </a:pPr>
             <a:r>
@@ -5115,7 +4864,7 @@
           <a:bodyPr wrap="square" rtlCol="0" anchor="ctr"/>
           <a:lstStyle/>
           <a:p>
-            <a:pPr algn="ctr" indent="0" marL="0">
+            <a:pPr marL="0" indent="0" algn="ctr">
               <a:buNone/>
             </a:pPr>
             <a:r>
@@ -5154,7 +4903,7 @@
           <a:bodyPr wrap="square" rtlCol="0" anchor="ctr"/>
           <a:lstStyle/>
           <a:p>
-            <a:pPr indent="0" marL="0">
+            <a:pPr marL="0" indent="0">
               <a:buNone/>
             </a:pPr>
             <a:r>
@@ -5193,7 +4942,7 @@
           <a:bodyPr wrap="square" rtlCol="0" anchor="ctr"/>
           <a:lstStyle/>
           <a:p>
-            <a:pPr algn="r" indent="0" marL="0">
+            <a:pPr marL="0" indent="0" algn="r">
               <a:buNone/>
             </a:pPr>
             <a:r>
@@ -5227,6 +4976,7 @@
         <a:solidFill>
           <a:srgbClr val="FAF8F5"/>
         </a:solidFill>
+        <a:effectLst/>
       </p:bgPr>
     </p:bg>
     <p:spTree>
@@ -5264,11 +5014,11 @@
           <a:bodyPr wrap="square" rtlCol="0" anchor="ctr"/>
           <a:lstStyle/>
           <a:p>
-            <a:pPr indent="0" marL="0">
-              <a:buNone/>
-            </a:pPr>
-            <a:r>
-              <a:rPr lang="en-US" sz="1100" b="1" spc="200" kern="0" dirty="0">
+            <a:pPr marL="0" indent="0">
+              <a:buNone/>
+            </a:pPr>
+            <a:r>
+              <a:rPr lang="en-US" sz="1100" b="1" kern="0" spc="200" dirty="0">
                 <a:solidFill>
                   <a:srgbClr val="E07B5A"/>
                 </a:solidFill>
@@ -5303,7 +5053,7 @@
           <a:bodyPr wrap="square" rtlCol="0" anchor="ctr"/>
           <a:lstStyle/>
           <a:p>
-            <a:pPr indent="0" marL="0">
+            <a:pPr marL="0" indent="0">
               <a:lnSpc>
                 <a:spcPct val="110000"/>
               </a:lnSpc>
@@ -5372,7 +5122,7 @@
           <a:bodyPr wrap="square" rtlCol="0" anchor="ctr"/>
           <a:lstStyle/>
           <a:p>
-            <a:pPr indent="0" marL="0">
+            <a:pPr marL="0" indent="0">
               <a:buNone/>
             </a:pPr>
             <a:r>
@@ -5487,7 +5237,7 @@
           <a:bodyPr wrap="square" rtlCol="0" anchor="ctr"/>
           <a:lstStyle/>
           <a:p>
-            <a:pPr algn="ctr" indent="0" marL="0">
+            <a:pPr marL="0" indent="0" algn="ctr">
               <a:buNone/>
             </a:pPr>
             <a:r>
@@ -5504,7 +5254,7 @@
             <a:endParaRPr lang="en-US" sz="1000" dirty="0"/>
           </a:p>
           <a:p>
-            <a:pPr algn="ctr" indent="0" marL="0">
+            <a:pPr marL="0" indent="0" algn="ctr">
               <a:buNone/>
             </a:pPr>
             <a:r>
@@ -5570,7 +5320,7 @@
           <a:bodyPr wrap="square" rtlCol="0" anchor="ctr"/>
           <a:lstStyle/>
           <a:p>
-            <a:pPr indent="0" marL="0">
+            <a:pPr marL="0" indent="0">
               <a:buNone/>
             </a:pPr>
             <a:r>
@@ -5685,7 +5435,7 @@
           <a:bodyPr wrap="square" rtlCol="0" anchor="ctr"/>
           <a:lstStyle/>
           <a:p>
-            <a:pPr algn="ctr" indent="0" marL="0">
+            <a:pPr marL="0" indent="0" algn="ctr">
               <a:buNone/>
             </a:pPr>
             <a:r>
@@ -5702,7 +5452,7 @@
             <a:endParaRPr lang="en-US" sz="1000" dirty="0"/>
           </a:p>
           <a:p>
-            <a:pPr algn="ctr" indent="0" marL="0">
+            <a:pPr marL="0" indent="0" algn="ctr">
               <a:buNone/>
             </a:pPr>
             <a:r>
@@ -5741,7 +5491,7 @@
           <a:bodyPr wrap="square" rtlCol="0" anchor="ctr"/>
           <a:lstStyle/>
           <a:p>
-            <a:pPr algn="ctr" indent="0" marL="0">
+            <a:pPr marL="0" indent="0" algn="ctr">
               <a:buNone/>
             </a:pPr>
             <a:r>
@@ -5777,7 +5527,7 @@
           <a:bodyPr wrap="square" rtlCol="0" anchor="ctr"/>
           <a:lstStyle/>
           <a:p>
-            <a:pPr algn="ctr" indent="0" marL="0">
+            <a:pPr marL="0" indent="0" algn="ctr">
               <a:buNone/>
             </a:pPr>
             <a:r>
@@ -5813,7 +5563,7 @@
           <a:bodyPr wrap="square" rtlCol="0" anchor="ctr"/>
           <a:lstStyle/>
           <a:p>
-            <a:pPr indent="0" marL="0">
+            <a:pPr marL="0" indent="0">
               <a:buNone/>
             </a:pPr>
             <a:r>
@@ -5879,7 +5629,7 @@
           <a:bodyPr wrap="square" rtlCol="0" anchor="ctr"/>
           <a:lstStyle/>
           <a:p>
-            <a:pPr indent="0" marL="0">
+            <a:pPr marL="0" indent="0">
               <a:buNone/>
             </a:pPr>
             <a:r>
@@ -5918,7 +5668,7 @@
           <a:bodyPr wrap="square" rtlCol="0" anchor="ctr"/>
           <a:lstStyle/>
           <a:p>
-            <a:pPr indent="0" marL="0">
+            <a:pPr marL="0" indent="0">
               <a:buNone/>
             </a:pPr>
             <a:r>
@@ -5984,7 +5734,7 @@
           <a:bodyPr wrap="square" rtlCol="0" anchor="ctr"/>
           <a:lstStyle/>
           <a:p>
-            <a:pPr indent="0" marL="0">
+            <a:pPr marL="0" indent="0">
               <a:buNone/>
             </a:pPr>
             <a:r>
@@ -6023,7 +5773,7 @@
           <a:bodyPr wrap="square" rtlCol="0" anchor="ctr"/>
           <a:lstStyle/>
           <a:p>
-            <a:pPr indent="0" marL="0">
+            <a:pPr marL="0" indent="0">
               <a:buNone/>
             </a:pPr>
             <a:r>
@@ -6089,7 +5839,7 @@
           <a:bodyPr wrap="square" rtlCol="0" anchor="ctr"/>
           <a:lstStyle/>
           <a:p>
-            <a:pPr indent="0" marL="0">
+            <a:pPr marL="0" indent="0">
               <a:buNone/>
             </a:pPr>
             <a:r>
@@ -6128,7 +5878,7 @@
           <a:bodyPr wrap="square" rtlCol="0" anchor="ctr"/>
           <a:lstStyle/>
           <a:p>
-            <a:pPr indent="0" marL="0">
+            <a:pPr marL="0" indent="0">
               <a:buNone/>
             </a:pPr>
             <a:r>
@@ -6194,7 +5944,7 @@
           <a:bodyPr wrap="square" rtlCol="0" anchor="ctr"/>
           <a:lstStyle/>
           <a:p>
-            <a:pPr indent="0" marL="0">
+            <a:pPr marL="0" indent="0">
               <a:buNone/>
             </a:pPr>
             <a:r>
@@ -6233,7 +5983,7 @@
           <a:bodyPr wrap="square" rtlCol="0" anchor="ctr"/>
           <a:lstStyle/>
           <a:p>
-            <a:pPr indent="0" marL="0">
+            <a:pPr marL="0" indent="0">
               <a:buNone/>
             </a:pPr>
             <a:r>
@@ -6299,7 +6049,7 @@
           <a:bodyPr wrap="square" rtlCol="0" anchor="ctr"/>
           <a:lstStyle/>
           <a:p>
-            <a:pPr indent="0" marL="0">
+            <a:pPr marL="0" indent="0">
               <a:buNone/>
             </a:pPr>
             <a:r>
@@ -6338,7 +6088,7 @@
           <a:bodyPr wrap="square" rtlCol="0" anchor="ctr"/>
           <a:lstStyle/>
           <a:p>
-            <a:pPr indent="0" marL="0">
+            <a:pPr marL="0" indent="0">
               <a:buNone/>
             </a:pPr>
             <a:r>
@@ -6377,7 +6127,7 @@
           <a:bodyPr wrap="square" rtlCol="0" anchor="ctr"/>
           <a:lstStyle/>
           <a:p>
-            <a:pPr indent="0" marL="0">
+            <a:pPr marL="0" indent="0">
               <a:buNone/>
             </a:pPr>
             <a:r>
@@ -6416,7 +6166,7 @@
           <a:bodyPr wrap="square" rtlCol="0" anchor="ctr"/>
           <a:lstStyle/>
           <a:p>
-            <a:pPr algn="r" indent="0" marL="0">
+            <a:pPr marL="0" indent="0" algn="r">
               <a:buNone/>
             </a:pPr>
             <a:r>
@@ -6450,6 +6200,7 @@
         <a:solidFill>
           <a:srgbClr val="FAF8F5"/>
         </a:solidFill>
+        <a:effectLst/>
       </p:bgPr>
     </p:bg>
     <p:spTree>
@@ -6487,11 +6238,11 @@
           <a:bodyPr wrap="square" rtlCol="0" anchor="ctr"/>
           <a:lstStyle/>
           <a:p>
-            <a:pPr indent="0" marL="0">
-              <a:buNone/>
-            </a:pPr>
-            <a:r>
-              <a:rPr lang="en-US" sz="1100" b="1" spc="200" kern="0" dirty="0">
+            <a:pPr marL="0" indent="0">
+              <a:buNone/>
+            </a:pPr>
+            <a:r>
+              <a:rPr lang="en-US" sz="1100" b="1" kern="0" spc="200" dirty="0">
                 <a:solidFill>
                   <a:srgbClr val="E07B5A"/>
                 </a:solidFill>
@@ -6526,7 +6277,7 @@
           <a:bodyPr wrap="square" rtlCol="0" anchor="ctr"/>
           <a:lstStyle/>
           <a:p>
-            <a:pPr indent="0" marL="0">
+            <a:pPr marL="0" indent="0">
               <a:lnSpc>
                 <a:spcPct val="110000"/>
               </a:lnSpc>
@@ -6617,7 +6368,7 @@
           <a:bodyPr wrap="square" rtlCol="0" anchor="ctr"/>
           <a:lstStyle/>
           <a:p>
-            <a:pPr indent="0" marL="0">
+            <a:pPr marL="0" indent="0">
               <a:buNone/>
             </a:pPr>
             <a:r>
@@ -6656,7 +6407,7 @@
           <a:bodyPr wrap="square" rtlCol="0" anchor="t"/>
           <a:lstStyle/>
           <a:p>
-            <a:pPr indent="0" marL="0">
+            <a:pPr marL="0" indent="0">
               <a:lnSpc>
                 <a:spcPct val="130000"/>
               </a:lnSpc>
@@ -6676,7 +6427,7 @@
             <a:endParaRPr lang="en-US" sz="1300" dirty="0"/>
           </a:p>
           <a:p>
-            <a:pPr indent="0" marL="0">
+            <a:pPr marL="0" indent="0">
               <a:lnSpc>
                 <a:spcPct val="130000"/>
               </a:lnSpc>
@@ -6685,7 +6436,7 @@
             <a:endParaRPr lang="en-US" sz="1300" dirty="0"/>
           </a:p>
           <a:p>
-            <a:pPr indent="0" marL="0">
+            <a:pPr marL="0" indent="0">
               <a:lnSpc>
                 <a:spcPct val="130000"/>
               </a:lnSpc>
@@ -6705,7 +6456,7 @@
             <a:endParaRPr lang="en-US" sz="1300" dirty="0"/>
           </a:p>
           <a:p>
-            <a:pPr indent="0" marL="0">
+            <a:pPr marL="0" indent="0">
               <a:lnSpc>
                 <a:spcPct val="130000"/>
               </a:lnSpc>
@@ -6714,7 +6465,7 @@
             <a:endParaRPr lang="en-US" sz="1300" dirty="0"/>
           </a:p>
           <a:p>
-            <a:pPr indent="0" marL="0">
+            <a:pPr marL="0" indent="0">
               <a:lnSpc>
                 <a:spcPct val="130000"/>
               </a:lnSpc>
@@ -6734,7 +6485,7 @@
             <a:endParaRPr lang="en-US" sz="1300" dirty="0"/>
           </a:p>
           <a:p>
-            <a:pPr indent="0" marL="0">
+            <a:pPr marL="0" indent="0">
               <a:lnSpc>
                 <a:spcPct val="130000"/>
               </a:lnSpc>
@@ -6754,7 +6505,7 @@
             <a:endParaRPr lang="en-US" sz="1300" dirty="0"/>
           </a:p>
           <a:p>
-            <a:pPr indent="0" marL="0">
+            <a:pPr marL="0" indent="0">
               <a:lnSpc>
                 <a:spcPct val="130000"/>
               </a:lnSpc>
@@ -6774,7 +6525,7 @@
             <a:endParaRPr lang="en-US" sz="1300" dirty="0"/>
           </a:p>
           <a:p>
-            <a:pPr indent="0" marL="0">
+            <a:pPr marL="0" indent="0">
               <a:lnSpc>
                 <a:spcPct val="130000"/>
               </a:lnSpc>
@@ -6794,7 +6545,7 @@
             <a:endParaRPr lang="en-US" sz="1300" dirty="0"/>
           </a:p>
           <a:p>
-            <a:pPr indent="0" marL="0">
+            <a:pPr marL="0" indent="0">
               <a:lnSpc>
                 <a:spcPct val="130000"/>
               </a:lnSpc>
@@ -6803,7 +6554,7 @@
             <a:endParaRPr lang="en-US" sz="1300" dirty="0"/>
           </a:p>
           <a:p>
-            <a:pPr indent="0" marL="0">
+            <a:pPr marL="0" indent="0">
               <a:lnSpc>
                 <a:spcPct val="130000"/>
               </a:lnSpc>
@@ -6823,7 +6574,7 @@
             <a:endParaRPr lang="en-US" sz="1300" dirty="0"/>
           </a:p>
           <a:p>
-            <a:pPr indent="0" marL="0">
+            <a:pPr marL="0" indent="0">
               <a:lnSpc>
                 <a:spcPct val="130000"/>
               </a:lnSpc>
@@ -6843,7 +6594,7 @@
             <a:endParaRPr lang="en-US" sz="1300" dirty="0"/>
           </a:p>
           <a:p>
-            <a:pPr indent="0" marL="0">
+            <a:pPr marL="0" indent="0">
               <a:lnSpc>
                 <a:spcPct val="130000"/>
               </a:lnSpc>
@@ -6863,7 +6614,7 @@
             <a:endParaRPr lang="en-US" sz="1300" dirty="0"/>
           </a:p>
           <a:p>
-            <a:pPr indent="0" marL="0">
+            <a:pPr marL="0" indent="0">
               <a:lnSpc>
                 <a:spcPct val="130000"/>
               </a:lnSpc>
@@ -6883,7 +6634,7 @@
             <a:endParaRPr lang="en-US" sz="1300" dirty="0"/>
           </a:p>
           <a:p>
-            <a:pPr indent="0" marL="0">
+            <a:pPr marL="0" indent="0">
               <a:lnSpc>
                 <a:spcPct val="130000"/>
               </a:lnSpc>
@@ -6903,7 +6654,7 @@
             <a:endParaRPr lang="en-US" sz="1300" dirty="0"/>
           </a:p>
           <a:p>
-            <a:pPr indent="0" marL="0">
+            <a:pPr marL="0" indent="0">
               <a:lnSpc>
                 <a:spcPct val="130000"/>
               </a:lnSpc>
@@ -6945,7 +6696,7 @@
           <a:bodyPr wrap="square" rtlCol="0" anchor="ctr"/>
           <a:lstStyle/>
           <a:p>
-            <a:pPr indent="0" marL="0">
+            <a:pPr marL="0" indent="0">
               <a:buNone/>
             </a:pPr>
             <a:r>
@@ -7004,7 +6755,7 @@
           <a:bodyPr wrap="square" rtlCol="0" anchor="ctr"/>
           <a:lstStyle/>
           <a:p>
-            <a:pPr indent="0" marL="0">
+            <a:pPr marL="0" indent="0">
               <a:buNone/>
             </a:pPr>
             <a:r>
@@ -7043,7 +6794,7 @@
           <a:bodyPr wrap="square" rtlCol="0" anchor="ctr"/>
           <a:lstStyle/>
           <a:p>
-            <a:pPr indent="0" marL="0">
+            <a:pPr marL="0" indent="0">
               <a:buNone/>
             </a:pPr>
             <a:r>
@@ -7102,7 +6853,7 @@
           <a:bodyPr wrap="square" rtlCol="0" anchor="ctr"/>
           <a:lstStyle/>
           <a:p>
-            <a:pPr indent="0" marL="0">
+            <a:pPr marL="0" indent="0">
               <a:buNone/>
             </a:pPr>
             <a:r>
@@ -7141,7 +6892,7 @@
           <a:bodyPr wrap="square" rtlCol="0" anchor="ctr"/>
           <a:lstStyle/>
           <a:p>
-            <a:pPr indent="0" marL="0">
+            <a:pPr marL="0" indent="0">
               <a:buNone/>
             </a:pPr>
             <a:r>
@@ -7200,7 +6951,7 @@
           <a:bodyPr wrap="square" rtlCol="0" anchor="ctr"/>
           <a:lstStyle/>
           <a:p>
-            <a:pPr indent="0" marL="0">
+            <a:pPr marL="0" indent="0">
               <a:buNone/>
             </a:pPr>
             <a:r>
@@ -7239,7 +6990,7 @@
           <a:bodyPr wrap="square" rtlCol="0" anchor="ctr"/>
           <a:lstStyle/>
           <a:p>
-            <a:pPr indent="0" marL="0">
+            <a:pPr marL="0" indent="0">
               <a:buNone/>
             </a:pPr>
             <a:r>
@@ -7298,7 +7049,7 @@
           <a:bodyPr wrap="square" rtlCol="0" anchor="ctr"/>
           <a:lstStyle/>
           <a:p>
-            <a:pPr indent="0" marL="0">
+            <a:pPr marL="0" indent="0">
               <a:buNone/>
             </a:pPr>
             <a:r>
@@ -7337,7 +7088,7 @@
           <a:bodyPr wrap="square" rtlCol="0" anchor="ctr"/>
           <a:lstStyle/>
           <a:p>
-            <a:pPr indent="0" marL="0">
+            <a:pPr marL="0" indent="0">
               <a:buNone/>
             </a:pPr>
             <a:r>
@@ -7396,7 +7147,7 @@
           <a:bodyPr wrap="square" rtlCol="0" anchor="ctr"/>
           <a:lstStyle/>
           <a:p>
-            <a:pPr indent="0" marL="0">
+            <a:pPr marL="0" indent="0">
               <a:buNone/>
             </a:pPr>
             <a:r>
@@ -7435,7 +7186,7 @@
           <a:bodyPr wrap="square" rtlCol="0" anchor="ctr"/>
           <a:lstStyle/>
           <a:p>
-            <a:pPr indent="0" marL="0">
+            <a:pPr marL="0" indent="0">
               <a:buNone/>
             </a:pPr>
             <a:r>
@@ -7474,7 +7225,7 @@
           <a:bodyPr wrap="square" rtlCol="0" anchor="ctr"/>
           <a:lstStyle/>
           <a:p>
-            <a:pPr indent="0" marL="0">
+            <a:pPr marL="0" indent="0">
               <a:buNone/>
             </a:pPr>
             <a:r>
@@ -7513,7 +7264,7 @@
           <a:bodyPr wrap="square" rtlCol="0" anchor="ctr"/>
           <a:lstStyle/>
           <a:p>
-            <a:pPr algn="r" indent="0" marL="0">
+            <a:pPr marL="0" indent="0" algn="r">
               <a:buNone/>
             </a:pPr>
             <a:r>
@@ -7547,6 +7298,7 @@
         <a:solidFill>
           <a:srgbClr val="FAF8F5"/>
         </a:solidFill>
+        <a:effectLst/>
       </p:bgPr>
     </p:bg>
     <p:spTree>
@@ -7584,11 +7336,11 @@
           <a:bodyPr wrap="square" rtlCol="0" anchor="ctr"/>
           <a:lstStyle/>
           <a:p>
-            <a:pPr indent="0" marL="0">
-              <a:buNone/>
-            </a:pPr>
-            <a:r>
-              <a:rPr lang="en-US" sz="1100" b="1" spc="200" kern="0" dirty="0">
+            <a:pPr marL="0" indent="0">
+              <a:buNone/>
+            </a:pPr>
+            <a:r>
+              <a:rPr lang="en-US" sz="1100" b="1" kern="0" spc="200" dirty="0">
                 <a:solidFill>
                   <a:srgbClr val="E07B5A"/>
                 </a:solidFill>
@@ -7623,7 +7375,7 @@
           <a:bodyPr wrap="square" rtlCol="0" anchor="ctr"/>
           <a:lstStyle/>
           <a:p>
-            <a:pPr indent="0" marL="0">
+            <a:pPr marL="0" indent="0">
               <a:lnSpc>
                 <a:spcPct val="110000"/>
               </a:lnSpc>
@@ -7687,7 +7439,7 @@
           <a:bodyPr wrap="square" rtlCol="0" anchor="ctr"/>
           <a:lstStyle/>
           <a:p>
-            <a:pPr algn="ctr" indent="0" marL="0">
+            <a:pPr marL="0" indent="0" algn="ctr">
               <a:buNone/>
             </a:pPr>
             <a:r>
@@ -7726,7 +7478,7 @@
           <a:bodyPr wrap="square" rtlCol="0" anchor="ctr"/>
           <a:lstStyle/>
           <a:p>
-            <a:pPr algn="ctr" indent="0" marL="0">
+            <a:pPr marL="0" indent="0" algn="ctr">
               <a:buNone/>
             </a:pPr>
             <a:r>
@@ -7765,7 +7517,7 @@
           <a:bodyPr wrap="square" rtlCol="0" anchor="ctr"/>
           <a:lstStyle/>
           <a:p>
-            <a:pPr algn="ctr" indent="0" marL="0">
+            <a:pPr marL="0" indent="0" algn="ctr">
               <a:buNone/>
             </a:pPr>
             <a:r>
@@ -7823,7 +7575,7 @@
           <a:bodyPr wrap="square" rtlCol="0" anchor="ctr"/>
           <a:lstStyle/>
           <a:p>
-            <a:pPr algn="ctr" indent="0" marL="0">
+            <a:pPr marL="0" indent="0" algn="ctr">
               <a:buNone/>
             </a:pPr>
             <a:r>
@@ -7862,7 +7614,7 @@
           <a:bodyPr wrap="square" rtlCol="0" anchor="ctr"/>
           <a:lstStyle/>
           <a:p>
-            <a:pPr algn="ctr" indent="0" marL="0">
+            <a:pPr marL="0" indent="0" algn="ctr">
               <a:buNone/>
             </a:pPr>
             <a:r>
@@ -7920,7 +7672,7 @@
           <a:bodyPr wrap="square" rtlCol="0" anchor="ctr"/>
           <a:lstStyle/>
           <a:p>
-            <a:pPr algn="ctr" indent="0" marL="0">
+            <a:pPr marL="0" indent="0" algn="ctr">
               <a:buNone/>
             </a:pPr>
             <a:r>
@@ -7959,7 +7711,7 @@
           <a:bodyPr wrap="square" rtlCol="0" anchor="ctr"/>
           <a:lstStyle/>
           <a:p>
-            <a:pPr algn="ctr" indent="0" marL="0">
+            <a:pPr marL="0" indent="0" algn="ctr">
               <a:buNone/>
             </a:pPr>
             <a:r>
@@ -8020,7 +7772,7 @@
           <a:bodyPr wrap="square" rtlCol="0" anchor="ctr"/>
           <a:lstStyle/>
           <a:p>
-            <a:pPr algn="ctr" indent="0" marL="0">
+            <a:pPr marL="0" indent="0" algn="ctr">
               <a:buNone/>
             </a:pPr>
             <a:r>
@@ -8081,7 +7833,7 @@
           <a:bodyPr wrap="square" rtlCol="0" anchor="ctr"/>
           <a:lstStyle/>
           <a:p>
-            <a:pPr algn="ctr" indent="0" marL="0">
+            <a:pPr marL="0" indent="0" algn="ctr">
               <a:buNone/>
             </a:pPr>
             <a:r>
@@ -8142,7 +7894,7 @@
           <a:bodyPr wrap="square" rtlCol="0" anchor="ctr"/>
           <a:lstStyle/>
           <a:p>
-            <a:pPr algn="ctr" indent="0" marL="0">
+            <a:pPr marL="0" indent="0" algn="ctr">
               <a:buNone/>
             </a:pPr>
             <a:r>
@@ -8203,7 +7955,7 @@
           <a:bodyPr wrap="square" rtlCol="0" anchor="ctr"/>
           <a:lstStyle/>
           <a:p>
-            <a:pPr algn="ctr" indent="0" marL="0">
+            <a:pPr marL="0" indent="0" algn="ctr">
               <a:buNone/>
             </a:pPr>
             <a:r>
@@ -8242,7 +7994,7 @@
           <a:bodyPr wrap="square" rtlCol="0" anchor="ctr"/>
           <a:lstStyle/>
           <a:p>
-            <a:pPr indent="0" marL="0">
+            <a:pPr marL="0" indent="0">
               <a:buNone/>
             </a:pPr>
             <a:r>
@@ -8281,7 +8033,7 @@
           <a:bodyPr wrap="square" rtlCol="0" anchor="ctr"/>
           <a:lstStyle/>
           <a:p>
-            <a:pPr indent="0" marL="0">
+            <a:pPr marL="0" indent="0">
               <a:buNone/>
             </a:pPr>
             <a:r>
@@ -8320,7 +8072,7 @@
           <a:bodyPr wrap="square" rtlCol="0" anchor="ctr"/>
           <a:lstStyle/>
           <a:p>
-            <a:pPr indent="0" marL="0">
+            <a:pPr marL="0" indent="0">
               <a:buNone/>
             </a:pPr>
             <a:r>
@@ -8359,7 +8111,7 @@
           <a:bodyPr wrap="square" rtlCol="0" anchor="ctr"/>
           <a:lstStyle/>
           <a:p>
-            <a:pPr indent="0" marL="0">
+            <a:pPr marL="0" indent="0">
               <a:buNone/>
             </a:pPr>
             <a:r>
@@ -8386,19 +8138,19 @@
         <p:spPr>
           <a:xfrm>
             <a:off x="3200400" y="3657600"/>
-            <a:ext cx="-1828800" cy="365760"/>
-          </a:xfrm>
-          <a:prstGeom prst="rect">
-            <a:avLst/>
-          </a:prstGeom>
-          <a:noFill/>
-          <a:ln/>
-        </p:spPr>
-        <p:txBody>
-          <a:bodyPr wrap="square" rtlCol="0" anchor="ctr"/>
-          <a:lstStyle/>
-          <a:p>
-            <a:pPr algn="ctr" indent="0" marL="0">
+            <a:ext cx="0" cy="365760"/>
+          </a:xfrm>
+          <a:prstGeom prst="rect">
+            <a:avLst/>
+          </a:prstGeom>
+          <a:noFill/>
+          <a:ln/>
+        </p:spPr>
+        <p:txBody>
+          <a:bodyPr wrap="square" rtlCol="0" anchor="ctr"/>
+          <a:lstStyle/>
+          <a:p>
+            <a:pPr marL="0" indent="0" algn="ctr">
               <a:buNone/>
             </a:pPr>
             <a:r>
@@ -8434,7 +8186,7 @@
           <a:bodyPr wrap="square" rtlCol="0" anchor="ctr"/>
           <a:lstStyle/>
           <a:p>
-            <a:pPr indent="0" marL="0">
+            <a:pPr marL="0" indent="0">
               <a:buNone/>
             </a:pPr>
             <a:r>
@@ -8473,7 +8225,7 @@
           <a:bodyPr wrap="square" rtlCol="0" anchor="ctr"/>
           <a:lstStyle/>
           <a:p>
-            <a:pPr algn="r" indent="0" marL="0">
+            <a:pPr marL="0" indent="0" algn="r">
               <a:buNone/>
             </a:pPr>
             <a:r>
@@ -8507,6 +8259,7 @@
         <a:solidFill>
           <a:srgbClr val="FAF8F5"/>
         </a:solidFill>
+        <a:effectLst/>
       </p:bgPr>
     </p:bg>
     <p:spTree>
@@ -8544,11 +8297,11 @@
           <a:bodyPr wrap="square" rtlCol="0" anchor="ctr"/>
           <a:lstStyle/>
           <a:p>
-            <a:pPr indent="0" marL="0">
-              <a:buNone/>
-            </a:pPr>
-            <a:r>
-              <a:rPr lang="en-US" sz="1100" b="1" spc="200" kern="0" dirty="0">
+            <a:pPr marL="0" indent="0">
+              <a:buNone/>
+            </a:pPr>
+            <a:r>
+              <a:rPr lang="en-US" sz="1100" b="1" kern="0" spc="200" dirty="0">
                 <a:solidFill>
                   <a:srgbClr val="E07B5A"/>
                 </a:solidFill>
@@ -8583,7 +8336,7 @@
           <a:bodyPr wrap="square" rtlCol="0" anchor="ctr"/>
           <a:lstStyle/>
           <a:p>
-            <a:pPr indent="0" marL="0">
+            <a:pPr marL="0" indent="0">
               <a:lnSpc>
                 <a:spcPct val="110000"/>
               </a:lnSpc>
@@ -8647,7 +8400,7 @@
           <a:bodyPr wrap="square" rtlCol="0" anchor="ctr"/>
           <a:lstStyle/>
           <a:p>
-            <a:pPr algn="ctr" indent="0" marL="0">
+            <a:pPr marL="0" indent="0" algn="ctr">
               <a:buNone/>
             </a:pPr>
             <a:r>
@@ -8708,7 +8461,7 @@
           <a:bodyPr wrap="square" rtlCol="0" anchor="ctr"/>
           <a:lstStyle/>
           <a:p>
-            <a:pPr algn="ctr" indent="0" marL="0">
+            <a:pPr marL="0" indent="0" algn="ctr">
               <a:buNone/>
             </a:pPr>
             <a:r>
@@ -8769,7 +8522,7 @@
           <a:bodyPr wrap="square" rtlCol="0" anchor="ctr"/>
           <a:lstStyle/>
           <a:p>
-            <a:pPr algn="ctr" indent="0" marL="0">
+            <a:pPr marL="0" indent="0" algn="ctr">
               <a:buNone/>
             </a:pPr>
             <a:r>
@@ -8830,7 +8583,7 @@
           <a:bodyPr wrap="square" rtlCol="0" anchor="ctr"/>
           <a:lstStyle/>
           <a:p>
-            <a:pPr algn="ctr" indent="0" marL="0">
+            <a:pPr marL="0" indent="0" algn="ctr">
               <a:buNone/>
             </a:pPr>
             <a:r>
@@ -8896,7 +8649,7 @@
           <a:bodyPr wrap="square" rtlCol="0" anchor="ctr"/>
           <a:lstStyle/>
           <a:p>
-            <a:pPr algn="ctr" indent="0" marL="0">
+            <a:pPr marL="0" indent="0" algn="ctr">
               <a:buNone/>
             </a:pPr>
             <a:r>
@@ -8962,7 +8715,7 @@
           <a:bodyPr wrap="square" rtlCol="0" anchor="ctr"/>
           <a:lstStyle/>
           <a:p>
-            <a:pPr algn="ctr" indent="0" marL="0">
+            <a:pPr marL="0" indent="0" algn="ctr">
               <a:buNone/>
             </a:pPr>
             <a:r>
@@ -9028,7 +8781,7 @@
           <a:bodyPr wrap="square" rtlCol="0" anchor="ctr"/>
           <a:lstStyle/>
           <a:p>
-            <a:pPr algn="ctr" indent="0" marL="0">
+            <a:pPr marL="0" indent="0" algn="ctr">
               <a:buNone/>
             </a:pPr>
             <a:r>
@@ -9094,7 +8847,7 @@
           <a:bodyPr wrap="square" rtlCol="0" anchor="ctr"/>
           <a:lstStyle/>
           <a:p>
-            <a:pPr algn="ctr" indent="0" marL="0">
+            <a:pPr marL="0" indent="0" algn="ctr">
               <a:buNone/>
             </a:pPr>
             <a:r>
@@ -9133,7 +8886,7 @@
           <a:bodyPr wrap="square" rtlCol="0" anchor="ctr"/>
           <a:lstStyle/>
           <a:p>
-            <a:pPr indent="0" marL="0">
+            <a:pPr marL="0" indent="0">
               <a:buNone/>
             </a:pPr>
             <a:r>
@@ -9194,7 +8947,7 @@
           <a:bodyPr wrap="square" rtlCol="0" anchor="b"/>
           <a:lstStyle/>
           <a:p>
-            <a:pPr indent="0" marL="0">
+            <a:pPr marL="0" indent="0">
               <a:buNone/>
             </a:pPr>
             <a:r>
@@ -9233,7 +8986,7 @@
           <a:bodyPr wrap="square" rtlCol="0" anchor="t"/>
           <a:lstStyle/>
           <a:p>
-            <a:pPr indent="0" marL="0">
+            <a:pPr marL="0" indent="0">
               <a:buNone/>
             </a:pPr>
             <a:r>
@@ -9294,7 +9047,7 @@
           <a:bodyPr wrap="square" rtlCol="0" anchor="b"/>
           <a:lstStyle/>
           <a:p>
-            <a:pPr indent="0" marL="0">
+            <a:pPr marL="0" indent="0">
               <a:buNone/>
             </a:pPr>
             <a:r>
@@ -9333,7 +9086,7 @@
           <a:bodyPr wrap="square" rtlCol="0" anchor="t"/>
           <a:lstStyle/>
           <a:p>
-            <a:pPr indent="0" marL="0">
+            <a:pPr marL="0" indent="0">
               <a:buNone/>
             </a:pPr>
             <a:r>
@@ -9394,7 +9147,7 @@
           <a:bodyPr wrap="square" rtlCol="0" anchor="b"/>
           <a:lstStyle/>
           <a:p>
-            <a:pPr indent="0" marL="0">
+            <a:pPr marL="0" indent="0">
               <a:buNone/>
             </a:pPr>
             <a:r>
@@ -9433,7 +9186,7 @@
           <a:bodyPr wrap="square" rtlCol="0" anchor="t"/>
           <a:lstStyle/>
           <a:p>
-            <a:pPr indent="0" marL="0">
+            <a:pPr marL="0" indent="0">
               <a:buNone/>
             </a:pPr>
             <a:r>
@@ -9494,7 +9247,7 @@
           <a:bodyPr wrap="square" rtlCol="0" anchor="b"/>
           <a:lstStyle/>
           <a:p>
-            <a:pPr indent="0" marL="0">
+            <a:pPr marL="0" indent="0">
               <a:buNone/>
             </a:pPr>
             <a:r>
@@ -9533,7 +9286,7 @@
           <a:bodyPr wrap="square" rtlCol="0" anchor="t"/>
           <a:lstStyle/>
           <a:p>
-            <a:pPr indent="0" marL="0">
+            <a:pPr marL="0" indent="0">
               <a:buNone/>
             </a:pPr>
             <a:r>
@@ -9594,7 +9347,7 @@
           <a:bodyPr wrap="square" rtlCol="0" anchor="b"/>
           <a:lstStyle/>
           <a:p>
-            <a:pPr indent="0" marL="0">
+            <a:pPr marL="0" indent="0">
               <a:buNone/>
             </a:pPr>
             <a:r>
@@ -9633,7 +9386,7 @@
           <a:bodyPr wrap="square" rtlCol="0" anchor="t"/>
           <a:lstStyle/>
           <a:p>
-            <a:pPr indent="0" marL="0">
+            <a:pPr marL="0" indent="0">
               <a:buNone/>
             </a:pPr>
             <a:r>
@@ -9694,7 +9447,7 @@
           <a:bodyPr wrap="square" rtlCol="0" anchor="b"/>
           <a:lstStyle/>
           <a:p>
-            <a:pPr indent="0" marL="0">
+            <a:pPr marL="0" indent="0">
               <a:buNone/>
             </a:pPr>
             <a:r>
@@ -9733,7 +9486,7 @@
           <a:bodyPr wrap="square" rtlCol="0" anchor="t"/>
           <a:lstStyle/>
           <a:p>
-            <a:pPr indent="0" marL="0">
+            <a:pPr marL="0" indent="0">
               <a:buNone/>
             </a:pPr>
             <a:r>
@@ -9772,7 +9525,7 @@
           <a:bodyPr wrap="square" rtlCol="0" anchor="ctr"/>
           <a:lstStyle/>
           <a:p>
-            <a:pPr indent="0" marL="0">
+            <a:pPr marL="0" indent="0">
               <a:buNone/>
             </a:pPr>
             <a:r>
@@ -9811,7 +9564,7 @@
           <a:bodyPr wrap="square" rtlCol="0" anchor="ctr"/>
           <a:lstStyle/>
           <a:p>
-            <a:pPr algn="r" indent="0" marL="0">
+            <a:pPr marL="0" indent="0" algn="r">
               <a:buNone/>
             </a:pPr>
             <a:r>
@@ -9845,6 +9598,7 @@
         <a:solidFill>
           <a:srgbClr val="FAF8F5"/>
         </a:solidFill>
+        <a:effectLst/>
       </p:bgPr>
     </p:bg>
     <p:spTree>
@@ -9882,11 +9636,11 @@
           <a:bodyPr wrap="square" rtlCol="0" anchor="ctr"/>
           <a:lstStyle/>
           <a:p>
-            <a:pPr indent="0" marL="0">
-              <a:buNone/>
-            </a:pPr>
-            <a:r>
-              <a:rPr lang="en-US" sz="1100" b="1" spc="200" kern="0" dirty="0">
+            <a:pPr marL="0" indent="0">
+              <a:buNone/>
+            </a:pPr>
+            <a:r>
+              <a:rPr lang="en-US" sz="1100" b="1" kern="0" spc="200" dirty="0">
                 <a:solidFill>
                   <a:srgbClr val="E07B5A"/>
                 </a:solidFill>
@@ -9921,7 +9675,7 @@
           <a:bodyPr wrap="square" rtlCol="0" anchor="ctr"/>
           <a:lstStyle/>
           <a:p>
-            <a:pPr indent="0" marL="0">
+            <a:pPr marL="0" indent="0">
               <a:lnSpc>
                 <a:spcPct val="110000"/>
               </a:lnSpc>
@@ -9985,7 +9739,7 @@
           <a:bodyPr wrap="square" rtlCol="0" anchor="ctr"/>
           <a:lstStyle/>
           <a:p>
-            <a:pPr algn="ctr" indent="0" marL="0">
+            <a:pPr marL="0" indent="0" algn="ctr">
               <a:buNone/>
             </a:pPr>
             <a:r>
@@ -10046,7 +9800,7 @@
           <a:bodyPr wrap="square" rtlCol="0" anchor="ctr"/>
           <a:lstStyle/>
           <a:p>
-            <a:pPr indent="0" marL="0">
+            <a:pPr marL="0" indent="0">
               <a:buNone/>
             </a:pPr>
             <a:r>
@@ -10107,7 +9861,7 @@
           <a:bodyPr wrap="square" rtlCol="0" anchor="ctr"/>
           <a:lstStyle/>
           <a:p>
-            <a:pPr indent="0" marL="0">
+            <a:pPr marL="0" indent="0">
               <a:buNone/>
             </a:pPr>
             <a:r>
@@ -10168,7 +9922,7 @@
           <a:bodyPr wrap="square" rtlCol="0" anchor="ctr"/>
           <a:lstStyle/>
           <a:p>
-            <a:pPr indent="0" marL="0">
+            <a:pPr marL="0" indent="0">
               <a:buNone/>
             </a:pPr>
             <a:r>
@@ -10229,7 +9983,7 @@
           <a:bodyPr wrap="square" rtlCol="0" anchor="ctr"/>
           <a:lstStyle/>
           <a:p>
-            <a:pPr indent="0" marL="0">
+            <a:pPr marL="0" indent="0">
               <a:buNone/>
             </a:pPr>
             <a:r>
@@ -10310,7 +10064,7 @@
           <a:bodyPr wrap="square" rtlCol="0" anchor="ctr"/>
           <a:lstStyle/>
           <a:p>
-            <a:pPr algn="ctr" indent="0" marL="0">
+            <a:pPr marL="0" indent="0" algn="ctr">
               <a:buNone/>
             </a:pPr>
             <a:r>
@@ -10371,7 +10125,7 @@
           <a:bodyPr wrap="square" rtlCol="0" anchor="ctr"/>
           <a:lstStyle/>
           <a:p>
-            <a:pPr indent="0" marL="0">
+            <a:pPr marL="0" indent="0">
               <a:buNone/>
             </a:pPr>
             <a:r>
@@ -10432,7 +10186,7 @@
           <a:bodyPr wrap="square" rtlCol="0" anchor="ctr"/>
           <a:lstStyle/>
           <a:p>
-            <a:pPr indent="0" marL="0">
+            <a:pPr marL="0" indent="0">
               <a:buNone/>
             </a:pPr>
             <a:r>
@@ -10493,7 +10247,7 @@
           <a:bodyPr wrap="square" rtlCol="0" anchor="ctr"/>
           <a:lstStyle/>
           <a:p>
-            <a:pPr indent="0" marL="0">
+            <a:pPr marL="0" indent="0">
               <a:buNone/>
             </a:pPr>
             <a:r>
@@ -10554,7 +10308,7 @@
           <a:bodyPr wrap="square" rtlCol="0" anchor="ctr"/>
           <a:lstStyle/>
           <a:p>
-            <a:pPr indent="0" marL="0">
+            <a:pPr marL="0" indent="0">
               <a:buNone/>
             </a:pPr>
             <a:r>
@@ -10635,7 +10389,7 @@
           <a:bodyPr wrap="square" rtlCol="0" anchor="ctr"/>
           <a:lstStyle/>
           <a:p>
-            <a:pPr algn="ctr" indent="0" marL="0">
+            <a:pPr marL="0" indent="0" algn="ctr">
               <a:buNone/>
             </a:pPr>
             <a:r>
@@ -10696,7 +10450,7 @@
           <a:bodyPr wrap="square" rtlCol="0" anchor="ctr"/>
           <a:lstStyle/>
           <a:p>
-            <a:pPr indent="0" marL="0">
+            <a:pPr marL="0" indent="0">
               <a:buNone/>
             </a:pPr>
             <a:r>
@@ -10757,7 +10511,7 @@
           <a:bodyPr wrap="square" rtlCol="0" anchor="ctr"/>
           <a:lstStyle/>
           <a:p>
-            <a:pPr indent="0" marL="0">
+            <a:pPr marL="0" indent="0">
               <a:buNone/>
             </a:pPr>
             <a:r>
@@ -10818,7 +10572,7 @@
           <a:bodyPr wrap="square" rtlCol="0" anchor="ctr"/>
           <a:lstStyle/>
           <a:p>
-            <a:pPr indent="0" marL="0">
+            <a:pPr marL="0" indent="0">
               <a:buNone/>
             </a:pPr>
             <a:r>
@@ -10879,7 +10633,7 @@
           <a:bodyPr wrap="square" rtlCol="0" anchor="ctr"/>
           <a:lstStyle/>
           <a:p>
-            <a:pPr indent="0" marL="0">
+            <a:pPr marL="0" indent="0">
               <a:buNone/>
             </a:pPr>
             <a:r>
@@ -10938,7 +10692,7 @@
           <a:bodyPr wrap="square" rtlCol="0" anchor="ctr"/>
           <a:lstStyle/>
           <a:p>
-            <a:pPr indent="0" marL="0">
+            <a:pPr marL="0" indent="0">
               <a:buNone/>
             </a:pPr>
             <a:r>
@@ -10977,7 +10731,7 @@
           <a:bodyPr wrap="square" rtlCol="0" anchor="ctr"/>
           <a:lstStyle/>
           <a:p>
-            <a:pPr algn="r" indent="0" marL="0">
+            <a:pPr marL="0" indent="0" algn="r">
               <a:buNone/>
             </a:pPr>
             <a:r>
@@ -11011,6 +10765,7 @@
         <a:solidFill>
           <a:srgbClr val="FAF8F5"/>
         </a:solidFill>
+        <a:effectLst/>
       </p:bgPr>
     </p:bg>
     <p:spTree>
@@ -11048,11 +10803,11 @@
           <a:bodyPr wrap="square" rtlCol="0" anchor="ctr"/>
           <a:lstStyle/>
           <a:p>
-            <a:pPr indent="0" marL="0">
-              <a:buNone/>
-            </a:pPr>
-            <a:r>
-              <a:rPr lang="en-US" sz="1100" b="1" spc="200" kern="0" dirty="0">
+            <a:pPr marL="0" indent="0">
+              <a:buNone/>
+            </a:pPr>
+            <a:r>
+              <a:rPr lang="en-US" sz="1100" b="1" kern="0" spc="200" dirty="0">
                 <a:solidFill>
                   <a:srgbClr val="E07B5A"/>
                 </a:solidFill>
@@ -11087,7 +10842,7 @@
           <a:bodyPr wrap="square" rtlCol="0" anchor="ctr"/>
           <a:lstStyle/>
           <a:p>
-            <a:pPr indent="0" marL="0">
+            <a:pPr marL="0" indent="0">
               <a:lnSpc>
                 <a:spcPct val="110000"/>
               </a:lnSpc>
@@ -11151,7 +10906,7 @@
           <a:bodyPr wrap="square" rtlCol="0" anchor="ctr"/>
           <a:lstStyle/>
           <a:p>
-            <a:pPr algn="ctr" indent="0" marL="0">
+            <a:pPr marL="0" indent="0" algn="ctr">
               <a:buNone/>
             </a:pPr>
             <a:r>
@@ -11190,7 +10945,7 @@
           <a:bodyPr wrap="square" rtlCol="0" anchor="ctr"/>
           <a:lstStyle/>
           <a:p>
-            <a:pPr algn="ctr" indent="0" marL="0">
+            <a:pPr marL="0" indent="0" algn="ctr">
               <a:buNone/>
             </a:pPr>
             <a:r>
@@ -11248,7 +11003,7 @@
           <a:bodyPr wrap="square" rtlCol="0" anchor="ctr"/>
           <a:lstStyle/>
           <a:p>
-            <a:pPr algn="ctr" indent="0" marL="0">
+            <a:pPr marL="0" indent="0" algn="ctr">
               <a:buNone/>
             </a:pPr>
             <a:r>
@@ -11265,7 +11020,7 @@
             <a:endParaRPr lang="en-US" sz="1100" dirty="0"/>
           </a:p>
           <a:p>
-            <a:pPr algn="ctr" indent="0" marL="0">
+            <a:pPr marL="0" indent="0" algn="ctr">
               <a:buNone/>
             </a:pPr>
             <a:r>
@@ -11304,7 +11059,7 @@
           <a:bodyPr wrap="square" rtlCol="0" anchor="ctr"/>
           <a:lstStyle/>
           <a:p>
-            <a:pPr algn="ctr" indent="0" marL="0">
+            <a:pPr marL="0" indent="0" algn="ctr">
               <a:buNone/>
             </a:pPr>
             <a:r>
@@ -11362,7 +11117,7 @@
           <a:bodyPr wrap="square" rtlCol="0" anchor="ctr"/>
           <a:lstStyle/>
           <a:p>
-            <a:pPr algn="ctr" indent="0" marL="0">
+            <a:pPr marL="0" indent="0" algn="ctr">
               <a:buNone/>
             </a:pPr>
             <a:r>
@@ -11379,7 +11134,7 @@
             <a:endParaRPr lang="en-US" sz="1100" dirty="0"/>
           </a:p>
           <a:p>
-            <a:pPr algn="ctr" indent="0" marL="0">
+            <a:pPr marL="0" indent="0" algn="ctr">
               <a:buNone/>
             </a:pPr>
             <a:r>
@@ -11418,7 +11173,7 @@
           <a:bodyPr wrap="square" rtlCol="0" anchor="ctr"/>
           <a:lstStyle/>
           <a:p>
-            <a:pPr algn="ctr" indent="0" marL="0">
+            <a:pPr marL="0" indent="0" algn="ctr">
               <a:buNone/>
             </a:pPr>
             <a:r>
@@ -11476,7 +11231,7 @@
           <a:bodyPr wrap="square" rtlCol="0" anchor="ctr"/>
           <a:lstStyle/>
           <a:p>
-            <a:pPr algn="ctr" indent="0" marL="0">
+            <a:pPr marL="0" indent="0" algn="ctr">
               <a:buNone/>
             </a:pPr>
             <a:r>
@@ -11515,7 +11270,7 @@
           <a:bodyPr wrap="square" rtlCol="0" anchor="ctr"/>
           <a:lstStyle/>
           <a:p>
-            <a:pPr algn="ctr" indent="0" marL="0">
+            <a:pPr marL="0" indent="0" algn="ctr">
               <a:buNone/>
             </a:pPr>
             <a:r>
@@ -11573,7 +11328,7 @@
           <a:bodyPr wrap="square" rtlCol="0" anchor="ctr"/>
           <a:lstStyle/>
           <a:p>
-            <a:pPr algn="ctr" indent="0" marL="0">
+            <a:pPr marL="0" indent="0" algn="ctr">
               <a:buNone/>
             </a:pPr>
             <a:r>
@@ -11612,7 +11367,7 @@
           <a:bodyPr wrap="square" rtlCol="0" anchor="ctr"/>
           <a:lstStyle/>
           <a:p>
-            <a:pPr indent="0" marL="0">
+            <a:pPr marL="0" indent="0">
               <a:buNone/>
             </a:pPr>
             <a:r>
@@ -11673,7 +11428,7 @@
           <a:bodyPr wrap="square" rtlCol="0" anchor="ctr"/>
           <a:lstStyle/>
           <a:p>
-            <a:pPr algn="ctr" indent="0" marL="0">
+            <a:pPr marL="0" indent="0" algn="ctr">
               <a:buNone/>
             </a:pPr>
             <a:r>
@@ -11732,7 +11487,7 @@
           <a:bodyPr wrap="square" rtlCol="0" anchor="ctr"/>
           <a:lstStyle/>
           <a:p>
-            <a:pPr algn="ctr" indent="0" marL="0">
+            <a:pPr marL="0" indent="0" algn="ctr">
               <a:buNone/>
             </a:pPr>
             <a:r>
@@ -11793,7 +11548,7 @@
           <a:bodyPr wrap="square" rtlCol="0" anchor="ctr"/>
           <a:lstStyle/>
           <a:p>
-            <a:pPr algn="ctr" indent="0" marL="0">
+            <a:pPr marL="0" indent="0" algn="ctr">
               <a:buNone/>
             </a:pPr>
             <a:r>
@@ -11852,7 +11607,7 @@
           <a:bodyPr wrap="square" rtlCol="0" anchor="ctr"/>
           <a:lstStyle/>
           <a:p>
-            <a:pPr indent="0" marL="0">
+            <a:pPr marL="0" indent="0">
               <a:buNone/>
             </a:pPr>
             <a:r>
@@ -11911,7 +11666,7 @@
           <a:bodyPr wrap="square" rtlCol="0" anchor="ctr"/>
           <a:lstStyle/>
           <a:p>
-            <a:pPr indent="0" marL="0">
+            <a:pPr marL="0" indent="0">
               <a:buNone/>
             </a:pPr>
             <a:r>
@@ -11970,7 +11725,7 @@
           <a:bodyPr wrap="square" rtlCol="0" anchor="ctr"/>
           <a:lstStyle/>
           <a:p>
-            <a:pPr indent="0" marL="0">
+            <a:pPr marL="0" indent="0">
               <a:buNone/>
             </a:pPr>
             <a:r>
@@ -12029,7 +11784,7 @@
           <a:bodyPr wrap="square" rtlCol="0" anchor="ctr"/>
           <a:lstStyle/>
           <a:p>
-            <a:pPr indent="0" marL="0">
+            <a:pPr marL="0" indent="0">
               <a:buNone/>
             </a:pPr>
             <a:r>
@@ -12088,7 +11843,7 @@
           <a:bodyPr wrap="square" rtlCol="0" anchor="ctr"/>
           <a:lstStyle/>
           <a:p>
-            <a:pPr indent="0" marL="0">
+            <a:pPr marL="0" indent="0">
               <a:buNone/>
             </a:pPr>
             <a:r>
@@ -12147,7 +11902,7 @@
           <a:bodyPr wrap="square" rtlCol="0" anchor="ctr"/>
           <a:lstStyle/>
           <a:p>
-            <a:pPr indent="0" marL="0">
+            <a:pPr marL="0" indent="0">
               <a:buNone/>
             </a:pPr>
             <a:r>
@@ -12206,7 +11961,7 @@
           <a:bodyPr wrap="square" rtlCol="0" anchor="ctr"/>
           <a:lstStyle/>
           <a:p>
-            <a:pPr indent="0" marL="0">
+            <a:pPr marL="0" indent="0">
               <a:buNone/>
             </a:pPr>
             <a:r>
@@ -12265,7 +12020,7 @@
           <a:bodyPr wrap="square" rtlCol="0" anchor="ctr"/>
           <a:lstStyle/>
           <a:p>
-            <a:pPr indent="0" marL="0">
+            <a:pPr marL="0" indent="0">
               <a:buNone/>
             </a:pPr>
             <a:r>
@@ -12324,7 +12079,7 @@
           <a:bodyPr wrap="square" rtlCol="0" anchor="ctr"/>
           <a:lstStyle/>
           <a:p>
-            <a:pPr indent="0" marL="0">
+            <a:pPr marL="0" indent="0">
               <a:buNone/>
             </a:pPr>
             <a:r>
@@ -12383,7 +12138,7 @@
           <a:bodyPr wrap="square" rtlCol="0" anchor="ctr"/>
           <a:lstStyle/>
           <a:p>
-            <a:pPr indent="0" marL="0">
+            <a:pPr marL="0" indent="0">
               <a:buNone/>
             </a:pPr>
             <a:r>
@@ -12442,7 +12197,7 @@
           <a:bodyPr wrap="square" rtlCol="0" anchor="ctr"/>
           <a:lstStyle/>
           <a:p>
-            <a:pPr indent="0" marL="0">
+            <a:pPr marL="0" indent="0">
               <a:buNone/>
             </a:pPr>
             <a:r>
@@ -12501,7 +12256,7 @@
           <a:bodyPr wrap="square" rtlCol="0" anchor="ctr"/>
           <a:lstStyle/>
           <a:p>
-            <a:pPr indent="0" marL="0">
+            <a:pPr marL="0" indent="0">
               <a:buNone/>
             </a:pPr>
             <a:r>
@@ -12560,7 +12315,7 @@
           <a:bodyPr wrap="square" rtlCol="0" anchor="ctr"/>
           <a:lstStyle/>
           <a:p>
-            <a:pPr indent="0" marL="0">
+            <a:pPr marL="0" indent="0">
               <a:buNone/>
             </a:pPr>
             <a:r>
@@ -12619,7 +12374,7 @@
           <a:bodyPr wrap="square" rtlCol="0" anchor="ctr"/>
           <a:lstStyle/>
           <a:p>
-            <a:pPr indent="0" marL="0">
+            <a:pPr marL="0" indent="0">
               <a:buNone/>
             </a:pPr>
             <a:r>
@@ -12678,7 +12433,7 @@
           <a:bodyPr wrap="square" rtlCol="0" anchor="ctr"/>
           <a:lstStyle/>
           <a:p>
-            <a:pPr indent="0" marL="0">
+            <a:pPr marL="0" indent="0">
               <a:buNone/>
             </a:pPr>
             <a:r>
@@ -12737,7 +12492,7 @@
           <a:bodyPr wrap="square" rtlCol="0" anchor="ctr"/>
           <a:lstStyle/>
           <a:p>
-            <a:pPr indent="0" marL="0">
+            <a:pPr marL="0" indent="0">
               <a:buNone/>
             </a:pPr>
             <a:r>
@@ -12796,7 +12551,7 @@
           <a:bodyPr wrap="square" rtlCol="0" anchor="ctr"/>
           <a:lstStyle/>
           <a:p>
-            <a:pPr indent="0" marL="0">
+            <a:pPr marL="0" indent="0">
               <a:buNone/>
             </a:pPr>
             <a:r>
@@ -12855,7 +12610,7 @@
           <a:bodyPr wrap="square" rtlCol="0" anchor="ctr"/>
           <a:lstStyle/>
           <a:p>
-            <a:pPr indent="0" marL="0">
+            <a:pPr marL="0" indent="0">
               <a:buNone/>
             </a:pPr>
             <a:r>
@@ -12914,7 +12669,7 @@
           <a:bodyPr wrap="square" rtlCol="0" anchor="ctr"/>
           <a:lstStyle/>
           <a:p>
-            <a:pPr indent="0" marL="0">
+            <a:pPr marL="0" indent="0">
               <a:buNone/>
             </a:pPr>
             <a:r>
@@ -12973,7 +12728,7 @@
           <a:bodyPr wrap="square" rtlCol="0" anchor="ctr"/>
           <a:lstStyle/>
           <a:p>
-            <a:pPr indent="0" marL="0">
+            <a:pPr marL="0" indent="0">
               <a:buNone/>
             </a:pPr>
             <a:r>
@@ -13032,7 +12787,7 @@
           <a:bodyPr wrap="square" rtlCol="0" anchor="ctr"/>
           <a:lstStyle/>
           <a:p>
-            <a:pPr indent="0" marL="0">
+            <a:pPr marL="0" indent="0">
               <a:buNone/>
             </a:pPr>
             <a:r>
@@ -13091,7 +12846,7 @@
           <a:bodyPr wrap="square" rtlCol="0" anchor="ctr"/>
           <a:lstStyle/>
           <a:p>
-            <a:pPr indent="0" marL="0">
+            <a:pPr marL="0" indent="0">
               <a:buNone/>
             </a:pPr>
             <a:r>
@@ -13150,7 +12905,7 @@
           <a:bodyPr wrap="square" rtlCol="0" anchor="ctr"/>
           <a:lstStyle/>
           <a:p>
-            <a:pPr indent="0" marL="0">
+            <a:pPr marL="0" indent="0">
               <a:buNone/>
             </a:pPr>
             <a:r>
@@ -13209,7 +12964,7 @@
           <a:bodyPr wrap="square" rtlCol="0" anchor="ctr"/>
           <a:lstStyle/>
           <a:p>
-            <a:pPr indent="0" marL="0">
+            <a:pPr marL="0" indent="0">
               <a:buNone/>
             </a:pPr>
             <a:r>
@@ -13268,7 +13023,7 @@
           <a:bodyPr wrap="square" rtlCol="0" anchor="ctr"/>
           <a:lstStyle/>
           <a:p>
-            <a:pPr indent="0" marL="0">
+            <a:pPr marL="0" indent="0">
               <a:buNone/>
             </a:pPr>
             <a:r>
@@ -13327,7 +13082,7 @@
           <a:bodyPr wrap="square" rtlCol="0" anchor="ctr"/>
           <a:lstStyle/>
           <a:p>
-            <a:pPr indent="0" marL="0">
+            <a:pPr marL="0" indent="0">
               <a:buNone/>
             </a:pPr>
             <a:r>
@@ -13386,7 +13141,7 @@
           <a:bodyPr wrap="square" rtlCol="0" anchor="ctr"/>
           <a:lstStyle/>
           <a:p>
-            <a:pPr indent="0" marL="0">
+            <a:pPr marL="0" indent="0">
               <a:buNone/>
             </a:pPr>
             <a:r>
@@ -13445,7 +13200,7 @@
           <a:bodyPr wrap="square" rtlCol="0" anchor="ctr"/>
           <a:lstStyle/>
           <a:p>
-            <a:pPr indent="0" marL="0">
+            <a:pPr marL="0" indent="0">
               <a:buNone/>
             </a:pPr>
             <a:r>
@@ -13504,7 +13259,7 @@
           <a:bodyPr wrap="square" rtlCol="0" anchor="ctr"/>
           <a:lstStyle/>
           <a:p>
-            <a:pPr indent="0" marL="0">
+            <a:pPr marL="0" indent="0">
               <a:buNone/>
             </a:pPr>
             <a:r>
@@ -13563,7 +13318,7 @@
           <a:bodyPr wrap="square" rtlCol="0" anchor="ctr"/>
           <a:lstStyle/>
           <a:p>
-            <a:pPr indent="0" marL="0">
+            <a:pPr marL="0" indent="0">
               <a:buNone/>
             </a:pPr>
             <a:r>
@@ -13602,7 +13357,7 @@
           <a:bodyPr wrap="square" rtlCol="0" anchor="ctr"/>
           <a:lstStyle/>
           <a:p>
-            <a:pPr indent="0" marL="0">
+            <a:pPr marL="0" indent="0">
               <a:buNone/>
             </a:pPr>
             <a:r>
@@ -13641,7 +13396,7 @@
           <a:bodyPr wrap="square" rtlCol="0" anchor="ctr"/>
           <a:lstStyle/>
           <a:p>
-            <a:pPr indent="0" marL="0">
+            <a:pPr marL="0" indent="0">
               <a:buNone/>
             </a:pPr>
             <a:r>
@@ -13680,7 +13435,7 @@
           <a:bodyPr wrap="square" rtlCol="0" anchor="ctr"/>
           <a:lstStyle/>
           <a:p>
-            <a:pPr indent="0" marL="0">
+            <a:pPr marL="0" indent="0">
               <a:buNone/>
             </a:pPr>
             <a:r>
@@ -13719,7 +13474,7 @@
           <a:bodyPr wrap="square" rtlCol="0" anchor="ctr"/>
           <a:lstStyle/>
           <a:p>
-            <a:pPr indent="0" marL="0">
+            <a:pPr marL="0" indent="0">
               <a:buNone/>
             </a:pPr>
             <a:r>
@@ -13758,7 +13513,7 @@
           <a:bodyPr wrap="square" rtlCol="0" anchor="ctr"/>
           <a:lstStyle/>
           <a:p>
-            <a:pPr algn="r" indent="0" marL="0">
+            <a:pPr marL="0" indent="0" algn="r">
               <a:buNone/>
             </a:pPr>
             <a:r>
@@ -13792,6 +13547,7 @@
         <a:solidFill>
           <a:srgbClr val="FAF8F5"/>
         </a:solidFill>
+        <a:effectLst/>
       </p:bgPr>
     </p:bg>
     <p:spTree>
@@ -13829,11 +13585,11 @@
           <a:bodyPr wrap="square" rtlCol="0" anchor="ctr"/>
           <a:lstStyle/>
           <a:p>
-            <a:pPr indent="0" marL="0">
-              <a:buNone/>
-            </a:pPr>
-            <a:r>
-              <a:rPr lang="en-US" sz="1100" b="1" spc="200" kern="0" dirty="0">
+            <a:pPr marL="0" indent="0">
+              <a:buNone/>
+            </a:pPr>
+            <a:r>
+              <a:rPr lang="en-US" sz="1100" b="1" kern="0" spc="200" dirty="0">
                 <a:solidFill>
                   <a:srgbClr val="E07B5A"/>
                 </a:solidFill>
@@ -13868,7 +13624,7 @@
           <a:bodyPr wrap="square" rtlCol="0" anchor="ctr"/>
           <a:lstStyle/>
           <a:p>
-            <a:pPr indent="0" marL="0">
+            <a:pPr marL="0" indent="0">
               <a:lnSpc>
                 <a:spcPct val="110000"/>
               </a:lnSpc>
@@ -13937,7 +13693,7 @@
           <a:bodyPr wrap="square" rtlCol="0" anchor="ctr"/>
           <a:lstStyle/>
           <a:p>
-            <a:pPr indent="0" marL="0">
+            <a:pPr marL="0" indent="0">
               <a:buNone/>
             </a:pPr>
             <a:r>
@@ -14003,7 +13759,7 @@
           <a:bodyPr wrap="square" rtlCol="0" anchor="ctr"/>
           <a:lstStyle/>
           <a:p>
-            <a:pPr algn="ctr" indent="0" marL="0">
+            <a:pPr marL="0" indent="0" algn="ctr">
               <a:buNone/>
             </a:pPr>
             <a:r>
@@ -14039,7 +13795,7 @@
           <a:bodyPr wrap="square" rtlCol="0" anchor="ctr"/>
           <a:lstStyle/>
           <a:p>
-            <a:pPr indent="0" marL="0">
+            <a:pPr marL="0" indent="0">
               <a:buNone/>
             </a:pPr>
             <a:r>
@@ -14078,7 +13834,7 @@
           <a:bodyPr wrap="square" rtlCol="0" anchor="ctr"/>
           <a:lstStyle/>
           <a:p>
-            <a:pPr indent="0" marL="0">
+            <a:pPr marL="0" indent="0">
               <a:buNone/>
             </a:pPr>
             <a:r>
@@ -14144,7 +13900,7 @@
           <a:bodyPr wrap="square" rtlCol="0" anchor="ctr"/>
           <a:lstStyle/>
           <a:p>
-            <a:pPr algn="ctr" indent="0" marL="0">
+            <a:pPr marL="0" indent="0" algn="ctr">
               <a:buNone/>
             </a:pPr>
             <a:r>
@@ -14180,7 +13936,7 @@
           <a:bodyPr wrap="square" rtlCol="0" anchor="ctr"/>
           <a:lstStyle/>
           <a:p>
-            <a:pPr indent="0" marL="0">
+            <a:pPr marL="0" indent="0">
               <a:buNone/>
             </a:pPr>
             <a:r>
@@ -14219,7 +13975,7 @@
           <a:bodyPr wrap="square" rtlCol="0" anchor="ctr"/>
           <a:lstStyle/>
           <a:p>
-            <a:pPr indent="0" marL="0">
+            <a:pPr marL="0" indent="0">
               <a:buNone/>
             </a:pPr>
             <a:r>
@@ -14285,7 +14041,7 @@
           <a:bodyPr wrap="square" rtlCol="0" anchor="ctr"/>
           <a:lstStyle/>
           <a:p>
-            <a:pPr algn="ctr" indent="0" marL="0">
+            <a:pPr marL="0" indent="0" algn="ctr">
               <a:buNone/>
             </a:pPr>
             <a:r>
@@ -14321,7 +14077,7 @@
           <a:bodyPr wrap="square" rtlCol="0" anchor="ctr"/>
           <a:lstStyle/>
           <a:p>
-            <a:pPr indent="0" marL="0">
+            <a:pPr marL="0" indent="0">
               <a:buNone/>
             </a:pPr>
             <a:r>
@@ -14360,7 +14116,7 @@
           <a:bodyPr wrap="square" rtlCol="0" anchor="ctr"/>
           <a:lstStyle/>
           <a:p>
-            <a:pPr indent="0" marL="0">
+            <a:pPr marL="0" indent="0">
               <a:buNone/>
             </a:pPr>
             <a:r>
@@ -14426,7 +14182,7 @@
           <a:bodyPr wrap="square" rtlCol="0" anchor="ctr"/>
           <a:lstStyle/>
           <a:p>
-            <a:pPr algn="ctr" indent="0" marL="0">
+            <a:pPr marL="0" indent="0" algn="ctr">
               <a:buNone/>
             </a:pPr>
             <a:r>
@@ -14462,7 +14218,7 @@
           <a:bodyPr wrap="square" rtlCol="0" anchor="ctr"/>
           <a:lstStyle/>
           <a:p>
-            <a:pPr indent="0" marL="0">
+            <a:pPr marL="0" indent="0">
               <a:buNone/>
             </a:pPr>
             <a:r>
@@ -14501,7 +14257,7 @@
           <a:bodyPr wrap="square" rtlCol="0" anchor="ctr"/>
           <a:lstStyle/>
           <a:p>
-            <a:pPr indent="0" marL="0">
+            <a:pPr marL="0" indent="0">
               <a:buNone/>
             </a:pPr>
             <a:r>
@@ -14567,7 +14323,7 @@
           <a:bodyPr wrap="square" rtlCol="0" anchor="ctr"/>
           <a:lstStyle/>
           <a:p>
-            <a:pPr algn="ctr" indent="0" marL="0">
+            <a:pPr marL="0" indent="0" algn="ctr">
               <a:buNone/>
             </a:pPr>
             <a:r>
@@ -14603,7 +14359,7 @@
           <a:bodyPr wrap="square" rtlCol="0" anchor="ctr"/>
           <a:lstStyle/>
           <a:p>
-            <a:pPr indent="0" marL="0">
+            <a:pPr marL="0" indent="0">
               <a:buNone/>
             </a:pPr>
             <a:r>
@@ -14642,7 +14398,7 @@
           <a:bodyPr wrap="square" rtlCol="0" anchor="ctr"/>
           <a:lstStyle/>
           <a:p>
-            <a:pPr indent="0" marL="0">
+            <a:pPr marL="0" indent="0">
               <a:buNone/>
             </a:pPr>
             <a:r>
@@ -14708,7 +14464,7 @@
           <a:bodyPr wrap="square" rtlCol="0" anchor="ctr"/>
           <a:lstStyle/>
           <a:p>
-            <a:pPr indent="0" marL="0">
+            <a:pPr marL="0" indent="0">
               <a:buNone/>
             </a:pPr>
             <a:r>
@@ -14774,7 +14530,7 @@
           <a:bodyPr wrap="square" rtlCol="0" anchor="ctr"/>
           <a:lstStyle/>
           <a:p>
-            <a:pPr algn="ctr" indent="0" marL="0">
+            <a:pPr marL="0" indent="0" algn="ctr">
               <a:buNone/>
             </a:pPr>
             <a:r>
@@ -14810,7 +14566,7 @@
           <a:bodyPr wrap="square" rtlCol="0" anchor="ctr"/>
           <a:lstStyle/>
           <a:p>
-            <a:pPr indent="0" marL="0">
+            <a:pPr marL="0" indent="0">
               <a:buNone/>
             </a:pPr>
             <a:r>
@@ -14849,7 +14605,7 @@
           <a:bodyPr wrap="square" rtlCol="0" anchor="ctr"/>
           <a:lstStyle/>
           <a:p>
-            <a:pPr indent="0" marL="0">
+            <a:pPr marL="0" indent="0">
               <a:buNone/>
             </a:pPr>
             <a:r>
@@ -14915,7 +14671,7 @@
           <a:bodyPr wrap="square" rtlCol="0" anchor="ctr"/>
           <a:lstStyle/>
           <a:p>
-            <a:pPr algn="ctr" indent="0" marL="0">
+            <a:pPr marL="0" indent="0" algn="ctr">
               <a:buNone/>
             </a:pPr>
             <a:r>
@@ -14951,7 +14707,7 @@
           <a:bodyPr wrap="square" rtlCol="0" anchor="ctr"/>
           <a:lstStyle/>
           <a:p>
-            <a:pPr indent="0" marL="0">
+            <a:pPr marL="0" indent="0">
               <a:buNone/>
             </a:pPr>
             <a:r>
@@ -14990,7 +14746,7 @@
           <a:bodyPr wrap="square" rtlCol="0" anchor="ctr"/>
           <a:lstStyle/>
           <a:p>
-            <a:pPr indent="0" marL="0">
+            <a:pPr marL="0" indent="0">
               <a:buNone/>
             </a:pPr>
             <a:r>
@@ -15056,7 +14812,7 @@
           <a:bodyPr wrap="square" rtlCol="0" anchor="ctr"/>
           <a:lstStyle/>
           <a:p>
-            <a:pPr algn="ctr" indent="0" marL="0">
+            <a:pPr marL="0" indent="0" algn="ctr">
               <a:buNone/>
             </a:pPr>
             <a:r>
@@ -15092,7 +14848,7 @@
           <a:bodyPr wrap="square" rtlCol="0" anchor="ctr"/>
           <a:lstStyle/>
           <a:p>
-            <a:pPr indent="0" marL="0">
+            <a:pPr marL="0" indent="0">
               <a:buNone/>
             </a:pPr>
             <a:r>
@@ -15131,7 +14887,7 @@
           <a:bodyPr wrap="square" rtlCol="0" anchor="ctr"/>
           <a:lstStyle/>
           <a:p>
-            <a:pPr indent="0" marL="0">
+            <a:pPr marL="0" indent="0">
               <a:buNone/>
             </a:pPr>
             <a:r>
@@ -15197,7 +14953,7 @@
           <a:bodyPr wrap="square" rtlCol="0" anchor="ctr"/>
           <a:lstStyle/>
           <a:p>
-            <a:pPr algn="ctr" indent="0" marL="0">
+            <a:pPr marL="0" indent="0" algn="ctr">
               <a:buNone/>
             </a:pPr>
             <a:r>
@@ -15233,7 +14989,7 @@
           <a:bodyPr wrap="square" rtlCol="0" anchor="ctr"/>
           <a:lstStyle/>
           <a:p>
-            <a:pPr indent="0" marL="0">
+            <a:pPr marL="0" indent="0">
               <a:buNone/>
             </a:pPr>
             <a:r>
@@ -15272,7 +15028,7 @@
           <a:bodyPr wrap="square" rtlCol="0" anchor="ctr"/>
           <a:lstStyle/>
           <a:p>
-            <a:pPr indent="0" marL="0">
+            <a:pPr marL="0" indent="0">
               <a:buNone/>
             </a:pPr>
             <a:r>
@@ -15338,7 +15094,7 @@
           <a:bodyPr wrap="square" rtlCol="0" anchor="ctr"/>
           <a:lstStyle/>
           <a:p>
-            <a:pPr algn="ctr" indent="0" marL="0">
+            <a:pPr marL="0" indent="0" algn="ctr">
               <a:buNone/>
             </a:pPr>
             <a:r>
@@ -15374,7 +15130,7 @@
           <a:bodyPr wrap="square" rtlCol="0" anchor="ctr"/>
           <a:lstStyle/>
           <a:p>
-            <a:pPr indent="0" marL="0">
+            <a:pPr marL="0" indent="0">
               <a:buNone/>
             </a:pPr>
             <a:r>
@@ -15413,7 +15169,7 @@
           <a:bodyPr wrap="square" rtlCol="0" anchor="ctr"/>
           <a:lstStyle/>
           <a:p>
-            <a:pPr indent="0" marL="0">
+            <a:pPr marL="0" indent="0">
               <a:buNone/>
             </a:pPr>
             <a:r>
@@ -15452,7 +15208,7 @@
           <a:bodyPr wrap="square" rtlCol="0" anchor="ctr"/>
           <a:lstStyle/>
           <a:p>
-            <a:pPr algn="ctr" indent="0" marL="0">
+            <a:pPr marL="0" indent="0" algn="ctr">
               <a:buNone/>
             </a:pPr>
             <a:r>
@@ -15469,7 +15225,7 @@
             <a:endParaRPr lang="en-US" sz="1800" dirty="0"/>
           </a:p>
           <a:p>
-            <a:pPr algn="ctr" indent="0" marL="0">
+            <a:pPr marL="0" indent="0" algn="ctr">
               <a:buNone/>
             </a:pPr>
             <a:r>
@@ -15486,7 +15242,7 @@
             <a:endParaRPr lang="en-US" sz="1800" dirty="0"/>
           </a:p>
           <a:p>
-            <a:pPr algn="ctr" indent="0" marL="0">
+            <a:pPr marL="0" indent="0" algn="ctr">
               <a:buNone/>
             </a:pPr>
             <a:r>
@@ -15547,7 +15303,7 @@
           <a:bodyPr wrap="square" rtlCol="0" anchor="ctr"/>
           <a:lstStyle/>
           <a:p>
-            <a:pPr algn="ctr" indent="0" marL="0">
+            <a:pPr marL="0" indent="0" algn="ctr">
               <a:buNone/>
             </a:pPr>
             <a:r>
@@ -15608,7 +15364,7 @@
           <a:bodyPr wrap="square" rtlCol="0" anchor="ctr"/>
           <a:lstStyle/>
           <a:p>
-            <a:pPr algn="ctr" indent="0" marL="0">
+            <a:pPr marL="0" indent="0" algn="ctr">
               <a:buNone/>
             </a:pPr>
             <a:r>
@@ -15647,7 +15403,7 @@
           <a:bodyPr wrap="square" rtlCol="0" anchor="ctr"/>
           <a:lstStyle/>
           <a:p>
-            <a:pPr indent="0" marL="0">
+            <a:pPr marL="0" indent="0">
               <a:buNone/>
             </a:pPr>
             <a:r>
@@ -15686,7 +15442,7 @@
           <a:bodyPr wrap="square" rtlCol="0" anchor="ctr"/>
           <a:lstStyle/>
           <a:p>
-            <a:pPr algn="r" indent="0" marL="0">
+            <a:pPr marL="0" indent="0" algn="r">
               <a:buNone/>
             </a:pPr>
             <a:r>
@@ -16005,4 +15761,299 @@
     </a:ext>
   </a:extLst>
 </a:theme>
+</file>
+
+<file path=ppt/theme/theme2.xml><?xml version="1.0" encoding="utf-8"?>
+<a:theme xmlns:a="http://schemas.openxmlformats.org/drawingml/2006/main" name="Office 主题​​">
+  <a:themeElements>
+    <a:clrScheme name="Office">
+      <a:dk1>
+        <a:sysClr val="windowText" lastClr="000000"/>
+      </a:dk1>
+      <a:lt1>
+        <a:sysClr val="window" lastClr="FFFFFF"/>
+      </a:lt1>
+      <a:dk2>
+        <a:srgbClr val="44546A"/>
+      </a:dk2>
+      <a:lt2>
+        <a:srgbClr val="E7E6E6"/>
+      </a:lt2>
+      <a:accent1>
+        <a:srgbClr val="4472C4"/>
+      </a:accent1>
+      <a:accent2>
+        <a:srgbClr val="ED7D31"/>
+      </a:accent2>
+      <a:accent3>
+        <a:srgbClr val="A5A5A5"/>
+      </a:accent3>
+      <a:accent4>
+        <a:srgbClr val="FFC000"/>
+      </a:accent4>
+      <a:accent5>
+        <a:srgbClr val="5B9BD5"/>
+      </a:accent5>
+      <a:accent6>
+        <a:srgbClr val="70AD47"/>
+      </a:accent6>
+      <a:hlink>
+        <a:srgbClr val="0563C1"/>
+      </a:hlink>
+      <a:folHlink>
+        <a:srgbClr val="954F72"/>
+      </a:folHlink>
+    </a:clrScheme>
+    <a:fontScheme name="Office">
+      <a:majorFont>
+        <a:latin typeface="等线 Light" panose="020F0302020204030204"/>
+        <a:ea typeface=""/>
+        <a:cs typeface=""/>
+        <a:font script="Jpan" typeface="游ゴシック Light"/>
+        <a:font script="Hang" typeface="맑은 고딕"/>
+        <a:font script="Hans" typeface="等线 Light"/>
+        <a:font script="Hant" typeface="新細明體"/>
+        <a:font script="Arab" typeface="Times New Roman"/>
+        <a:font script="Hebr" typeface="Times New Roman"/>
+        <a:font script="Thai" typeface="Angsana New"/>
+        <a:font script="Ethi" typeface="Nyala"/>
+        <a:font script="Beng" typeface="Vrinda"/>
+        <a:font script="Gujr" typeface="Shruti"/>
+        <a:font script="Khmr" typeface="MoolBoran"/>
+        <a:font script="Knda" typeface="Tunga"/>
+        <a:font script="Guru" typeface="Raavi"/>
+        <a:font script="Cans" typeface="Euphemia"/>
+        <a:font script="Cher" typeface="Plantagenet Cherokee"/>
+        <a:font script="Yiii" typeface="Microsoft Yi Baiti"/>
+        <a:font script="Tibt" typeface="Microsoft Himalaya"/>
+        <a:font script="Thaa" typeface="MV Boli"/>
+        <a:font script="Deva" typeface="Mangal"/>
+        <a:font script="Telu" typeface="Gautami"/>
+        <a:font script="Taml" typeface="Latha"/>
+        <a:font script="Syrc" typeface="Estrangelo Edessa"/>
+        <a:font script="Orya" typeface="Kalinga"/>
+        <a:font script="Mlym" typeface="Kartika"/>
+        <a:font script="Laoo" typeface="DokChampa"/>
+        <a:font script="Sinh" typeface="Iskoola Pota"/>
+        <a:font script="Mong" typeface="Mongolian Baiti"/>
+        <a:font script="Viet" typeface="Times New Roman"/>
+        <a:font script="Uigh" typeface="Microsoft Uighur"/>
+        <a:font script="Geor" typeface="Sylfaen"/>
+        <a:font script="Armn" typeface="Arial"/>
+        <a:font script="Bugi" typeface="Leelawadee UI"/>
+        <a:font script="Bopo" typeface="Microsoft JhengHei"/>
+        <a:font script="Java" typeface="Javanese Text"/>
+        <a:font script="Lisu" typeface="Segoe UI"/>
+        <a:font script="Mymr" typeface="Myanmar Text"/>
+        <a:font script="Nkoo" typeface="Ebrima"/>
+        <a:font script="Olck" typeface="Nirmala UI"/>
+        <a:font script="Osma" typeface="Ebrima"/>
+        <a:font script="Phag" typeface="Phagspa"/>
+        <a:font script="Syrn" typeface="Estrangelo Edessa"/>
+        <a:font script="Syrj" typeface="Estrangelo Edessa"/>
+        <a:font script="Syre" typeface="Estrangelo Edessa"/>
+        <a:font script="Sora" typeface="Nirmala UI"/>
+        <a:font script="Tale" typeface="Microsoft Tai Le"/>
+        <a:font script="Talu" typeface="Microsoft New Tai Lue"/>
+        <a:font script="Tfng" typeface="Ebrima"/>
+      </a:majorFont>
+      <a:minorFont>
+        <a:latin typeface="等线" panose="020F0502020204030204"/>
+        <a:ea typeface=""/>
+        <a:cs typeface=""/>
+        <a:font script="Jpan" typeface="游ゴシック"/>
+        <a:font script="Hang" typeface="맑은 고딕"/>
+        <a:font script="Hans" typeface="等线"/>
+        <a:font script="Hant" typeface="新細明體"/>
+        <a:font script="Arab" typeface="Arial"/>
+        <a:font script="Hebr" typeface="Arial"/>
+        <a:font script="Thai" typeface="Cordia New"/>
+        <a:font script="Ethi" typeface="Nyala"/>
+        <a:font script="Beng" typeface="Vrinda"/>
+        <a:font script="Gujr" typeface="Shruti"/>
+        <a:font script="Khmr" typeface="DaunPenh"/>
+        <a:font script="Knda" typeface="Tunga"/>
+        <a:font script="Guru" typeface="Raavi"/>
+        <a:font script="Cans" typeface="Euphemia"/>
+        <a:font script="Cher" typeface="Plantagenet Cherokee"/>
+        <a:font script="Yiii" typeface="Microsoft Yi Baiti"/>
+        <a:font script="Tibt" typeface="Microsoft Himalaya"/>
+        <a:font script="Thaa" typeface="MV Boli"/>
+        <a:font script="Deva" typeface="Mangal"/>
+        <a:font script="Telu" typeface="Gautami"/>
+        <a:font script="Taml" typeface="Latha"/>
+        <a:font script="Syrc" typeface="Estrangelo Edessa"/>
+        <a:font script="Orya" typeface="Kalinga"/>
+        <a:font script="Mlym" typeface="Kartika"/>
+        <a:font script="Laoo" typeface="DokChampa"/>
+        <a:font script="Sinh" typeface="Iskoola Pota"/>
+        <a:font script="Mong" typeface="Mongolian Baiti"/>
+        <a:font script="Viet" typeface="Arial"/>
+        <a:font script="Uigh" typeface="Microsoft Uighur"/>
+        <a:font script="Geor" typeface="Sylfaen"/>
+        <a:font script="Armn" typeface="Arial"/>
+        <a:font script="Bugi" typeface="Leelawadee UI"/>
+        <a:font script="Bopo" typeface="Microsoft JhengHei"/>
+        <a:font script="Java" typeface="Javanese Text"/>
+        <a:font script="Lisu" typeface="Segoe UI"/>
+        <a:font script="Mymr" typeface="Myanmar Text"/>
+        <a:font script="Nkoo" typeface="Ebrima"/>
+        <a:font script="Olck" typeface="Nirmala UI"/>
+        <a:font script="Osma" typeface="Ebrima"/>
+        <a:font script="Phag" typeface="Phagspa"/>
+        <a:font script="Syrn" typeface="Estrangelo Edessa"/>
+        <a:font script="Syrj" typeface="Estrangelo Edessa"/>
+        <a:font script="Syre" typeface="Estrangelo Edessa"/>
+        <a:font script="Sora" typeface="Nirmala UI"/>
+        <a:font script="Tale" typeface="Microsoft Tai Le"/>
+        <a:font script="Talu" typeface="Microsoft New Tai Lue"/>
+        <a:font script="Tfng" typeface="Ebrima"/>
+      </a:minorFont>
+    </a:fontScheme>
+    <a:fmtScheme name="Office">
+      <a:fillStyleLst>
+        <a:solidFill>
+          <a:schemeClr val="phClr"/>
+        </a:solidFill>
+        <a:gradFill rotWithShape="1">
+          <a:gsLst>
+            <a:gs pos="0">
+              <a:schemeClr val="phClr">
+                <a:lumMod val="110000"/>
+                <a:satMod val="105000"/>
+                <a:tint val="67000"/>
+              </a:schemeClr>
+            </a:gs>
+            <a:gs pos="50000">
+              <a:schemeClr val="phClr">
+                <a:lumMod val="105000"/>
+                <a:satMod val="103000"/>
+                <a:tint val="73000"/>
+              </a:schemeClr>
+            </a:gs>
+            <a:gs pos="100000">
+              <a:schemeClr val="phClr">
+                <a:lumMod val="105000"/>
+                <a:satMod val="109000"/>
+                <a:tint val="81000"/>
+              </a:schemeClr>
+            </a:gs>
+          </a:gsLst>
+          <a:lin ang="5400000" scaled="0"/>
+        </a:gradFill>
+        <a:gradFill rotWithShape="1">
+          <a:gsLst>
+            <a:gs pos="0">
+              <a:schemeClr val="phClr">
+                <a:satMod val="103000"/>
+                <a:lumMod val="102000"/>
+                <a:tint val="94000"/>
+              </a:schemeClr>
+            </a:gs>
+            <a:gs pos="50000">
+              <a:schemeClr val="phClr">
+                <a:satMod val="110000"/>
+                <a:lumMod val="100000"/>
+                <a:shade val="100000"/>
+              </a:schemeClr>
+            </a:gs>
+            <a:gs pos="100000">
+              <a:schemeClr val="phClr">
+                <a:lumMod val="99000"/>
+                <a:satMod val="120000"/>
+                <a:shade val="78000"/>
+              </a:schemeClr>
+            </a:gs>
+          </a:gsLst>
+          <a:lin ang="5400000" scaled="0"/>
+        </a:gradFill>
+      </a:fillStyleLst>
+      <a:lnStyleLst>
+        <a:ln w="6350" cap="flat" cmpd="sng" algn="ctr">
+          <a:solidFill>
+            <a:schemeClr val="phClr"/>
+          </a:solidFill>
+          <a:prstDash val="solid"/>
+          <a:miter lim="800000"/>
+        </a:ln>
+        <a:ln w="12700" cap="flat" cmpd="sng" algn="ctr">
+          <a:solidFill>
+            <a:schemeClr val="phClr"/>
+          </a:solidFill>
+          <a:prstDash val="solid"/>
+          <a:miter lim="800000"/>
+        </a:ln>
+        <a:ln w="19050" cap="flat" cmpd="sng" algn="ctr">
+          <a:solidFill>
+            <a:schemeClr val="phClr"/>
+          </a:solidFill>
+          <a:prstDash val="solid"/>
+          <a:miter lim="800000"/>
+        </a:ln>
+      </a:lnStyleLst>
+      <a:effectStyleLst>
+        <a:effectStyle>
+          <a:effectLst/>
+        </a:effectStyle>
+        <a:effectStyle>
+          <a:effectLst/>
+        </a:effectStyle>
+        <a:effectStyle>
+          <a:effectLst>
+            <a:outerShdw blurRad="57150" dist="19050" dir="5400000" algn="ctr" rotWithShape="0">
+              <a:srgbClr val="000000">
+                <a:alpha val="63000"/>
+              </a:srgbClr>
+            </a:outerShdw>
+          </a:effectLst>
+        </a:effectStyle>
+      </a:effectStyleLst>
+      <a:bgFillStyleLst>
+        <a:solidFill>
+          <a:schemeClr val="phClr"/>
+        </a:solidFill>
+        <a:solidFill>
+          <a:schemeClr val="phClr">
+            <a:tint val="95000"/>
+            <a:satMod val="170000"/>
+          </a:schemeClr>
+        </a:solidFill>
+        <a:gradFill rotWithShape="1">
+          <a:gsLst>
+            <a:gs pos="0">
+              <a:schemeClr val="phClr">
+                <a:tint val="93000"/>
+                <a:satMod val="150000"/>
+                <a:shade val="98000"/>
+                <a:lumMod val="102000"/>
+              </a:schemeClr>
+            </a:gs>
+            <a:gs pos="50000">
+              <a:schemeClr val="phClr">
+                <a:tint val="98000"/>
+                <a:satMod val="130000"/>
+                <a:shade val="90000"/>
+                <a:lumMod val="103000"/>
+              </a:schemeClr>
+            </a:gs>
+            <a:gs pos="100000">
+              <a:schemeClr val="phClr">
+                <a:shade val="63000"/>
+                <a:satMod val="120000"/>
+              </a:schemeClr>
+            </a:gs>
+          </a:gsLst>
+          <a:lin ang="5400000" scaled="0"/>
+        </a:gradFill>
+      </a:bgFillStyleLst>
+    </a:fmtScheme>
+  </a:themeElements>
+  <a:objectDefaults/>
+  <a:extraClrSchemeLst/>
+  <a:extLst>
+    <a:ext uri="{05A4C25C-085E-4340-85A3-A5531E510DB2}">
+      <thm15:themeFamily xmlns:thm15="http://schemas.microsoft.com/office/thememl/2012/main" name="Office Theme" id="{62F939B6-93AF-4DB8-9C6B-D6C7DFDC589F}" vid="{4A3C46E8-61CC-4603-A589-7422A47A8E4A}"/>
+    </a:ext>
+  </a:extLst>
+</a:theme>
 </file>